--- a/data/reports/investment_committee_presentation.pptx
+++ b/data/reports/investment_committee_presentation.pptx
@@ -3227,7 +3227,7 @@
           <a:p/>
           <a:p>
             <a:r>
-              <a:t>Pack_Score: 69.23</a:t>
+              <a:t>Pack_Score: 69.16</a:t>
             </a:r>
           </a:p>
           <a:p>
@@ -3252,7 +3252,7 @@
           </a:p>
           <a:p>
             <a:r>
-              <a:t>Stress_Average: 28.26</a:t>
+              <a:t>Stress_Average: 27.93</a:t>
             </a:r>
           </a:p>
           <a:p>
@@ -3672,7 +3672,7 @@
           </a:p>
           <a:p>
             <a:r>
-              <a:t>MARKET_CRASH_30 | Score: 22.00 | Impact: -25.00%</a:t>
+              <a:t>MARKET_CRASH_30 | Score: 20.00 | Impact: -30.00%</a:t>
             </a:r>
           </a:p>
           <a:p>

--- a/data/reports/investment_committee_presentation.pptx
+++ b/data/reports/investment_committee_presentation.pptx
@@ -13,6 +13,7 @@
     <p:sldId id="261" r:id="rId12"/>
     <p:sldId id="262" r:id="rId13"/>
     <p:sldId id="263" r:id="rId14"/>
+    <p:sldId id="264" r:id="rId15"/>
   </p:sldIdLst>
   <p:sldSz cx="9144000" cy="6858000" type="screen4x3"/>
   <p:notesSz cx="6858000" cy="9144000"/>
@@ -3262,6 +3263,16 @@
           </a:p>
           <a:p>
             <a:r>
+              <a:t>Alert_Health_Score: 0</a:t>
+            </a:r>
+          </a:p>
+          <a:p>
+            <a:r>
+              <a:t>Alert_Escalation: ESCALATING</a:t>
+            </a:r>
+          </a:p>
+          <a:p>
+            <a:r>
               <a:t>Pack_Grade: C</a:t>
             </a:r>
           </a:p>
@@ -3882,6 +3893,41 @@
           </a:p>
           <a:p>
             <a:r>
+              <a:t>=== Alert_Governance ===</a:t>
+            </a:r>
+          </a:p>
+          <a:p>
+            <a:r>
+              <a:t>Alert_Health_Score: 0</a:t>
+            </a:r>
+          </a:p>
+          <a:p>
+            <a:r>
+              <a:t>Alert_Escalation: ESCALATING</a:t>
+            </a:r>
+          </a:p>
+          <a:p>
+            <a:r>
+              <a:t>Governance_View: CRITICAL</a:t>
+            </a:r>
+          </a:p>
+          <a:p>
+            <a:r>
+              <a:t>Trend_Direction: INSUFFICIENT_HISTORY</a:t>
+            </a:r>
+          </a:p>
+          <a:p>
+            <a:r>
+              <a:t>Top_Category: STRESS</a:t>
+            </a:r>
+          </a:p>
+          <a:p>
+            <a:r>
+              <a:t>Total_Alerts: 18</a:t>
+            </a:r>
+          </a:p>
+          <a:p>
+            <a:r>
               <a:t>=== Surveillance ===</a:t>
             </a:r>
           </a:p>
@@ -3941,7 +3987,7 @@
           <a:lstStyle/>
           <a:p>
             <a:r>
-              <a:t>Portfolio Monitoring</a:t>
+              <a:t>Alert Governance</a:t>
             </a:r>
           </a:p>
         </p:txBody>
@@ -3985,6 +4031,121 @@
           </a:bodyPr>
           <a:lstStyle/>
           <a:p/>
+          <a:p>
+            <a:r>
+              <a:t>Health Score: 0</a:t>
+            </a:r>
+          </a:p>
+          <a:p>
+            <a:r>
+              <a:t>Escalation: ESCALATING</a:t>
+            </a:r>
+          </a:p>
+          <a:p>
+            <a:r>
+              <a:t>Governance View: CRITICAL</a:t>
+            </a:r>
+          </a:p>
+          <a:p>
+            <a:r>
+              <a:t>Trend Direction: INSUFFICIENT_HISTORY</a:t>
+            </a:r>
+          </a:p>
+          <a:p>
+            <a:r>
+              <a:t>Top Category: STRESS</a:t>
+            </a:r>
+          </a:p>
+        </p:txBody>
+      </p:sp>
+    </p:spTree>
+  </p:cSld>
+  <p:clrMapOvr>
+    <a:masterClrMapping/>
+  </p:clrMapOvr>
+</p:sld>
+</file>
+
+<file path=ppt/slides/slide9.xml><?xml version="1.0" encoding="utf-8"?>
+<p:sld xmlns:a="http://schemas.openxmlformats.org/drawingml/2006/main" xmlns:p="http://schemas.openxmlformats.org/presentationml/2006/main" xmlns:r="http://schemas.openxmlformats.org/officeDocument/2006/relationships">
+  <p:cSld>
+    <p:spTree>
+      <p:nvGrpSpPr>
+        <p:cNvPr id="1" name=""/>
+        <p:cNvGrpSpPr/>
+        <p:nvPr/>
+      </p:nvGrpSpPr>
+      <p:grpSpPr/>
+      <p:sp>
+        <p:nvSpPr>
+          <p:cNvPr id="2" name="Title 1"/>
+          <p:cNvSpPr>
+            <a:spLocks noGrp="1"/>
+          </p:cNvSpPr>
+          <p:nvPr>
+            <p:ph type="title"/>
+          </p:nvPr>
+        </p:nvSpPr>
+        <p:spPr/>
+        <p:txBody>
+          <a:bodyPr/>
+          <a:lstStyle/>
+          <a:p>
+            <a:r>
+              <a:t>Portfolio Monitoring</a:t>
+            </a:r>
+          </a:p>
+        </p:txBody>
+      </p:sp>
+      <p:sp>
+        <p:nvSpPr>
+          <p:cNvPr id="3" name="Content Placeholder 2"/>
+          <p:cNvSpPr>
+            <a:spLocks noGrp="1"/>
+          </p:cNvSpPr>
+          <p:nvPr>
+            <p:ph idx="1"/>
+          </p:nvPr>
+        </p:nvSpPr>
+        <p:spPr/>
+        <p:txBody>
+          <a:bodyPr/>
+          <a:lstStyle/>
+          <a:p/>
+        </p:txBody>
+      </p:sp>
+      <p:sp>
+        <p:nvSpPr>
+          <p:cNvPr id="4" name="TextBox 3"/>
+          <p:cNvSpPr txBox="1"/>
+          <p:nvPr/>
+        </p:nvSpPr>
+        <p:spPr>
+          <a:xfrm>
+            <a:off x="457200" y="1097280"/>
+            <a:ext cx="7315200" cy="3657600"/>
+          </a:xfrm>
+          <a:prstGeom prst="rect">
+            <a:avLst/>
+          </a:prstGeom>
+          <a:noFill/>
+        </p:spPr>
+        <p:txBody>
+          <a:bodyPr wrap="none">
+            <a:spAutoFit/>
+          </a:bodyPr>
+          <a:lstStyle/>
+          <a:p/>
+          <a:p>
+            <a:r>
+              <a:t>Alert_Health_Score: 0</a:t>
+            </a:r>
+          </a:p>
+          <a:p>
+            <a:r>
+              <a:t>Alert_Escalation: ESCALATING</a:t>
+            </a:r>
+          </a:p>
         </p:txBody>
       </p:sp>
     </p:spTree>

--- a/data/reports/investment_committee_presentation.pptx
+++ b/data/reports/investment_committee_presentation.pptx
@@ -13,6 +13,7 @@
     <p:sldId id="261" r:id="rId12"/>
     <p:sldId id="262" r:id="rId13"/>
     <p:sldId id="263" r:id="rId14"/>
+    <p:sldId id="264" r:id="rId15"/>
   </p:sldIdLst>
   <p:sldSz cx="9144000" cy="6858000" type="screen4x3"/>
   <p:notesSz cx="6858000" cy="9144000"/>
@@ -3262,6 +3263,16 @@
           </a:p>
           <a:p>
             <a:r>
+              <a:t>Alert_Health_Score: 0</a:t>
+            </a:r>
+          </a:p>
+          <a:p>
+            <a:r>
+              <a:t>Alert_Escalation: WATCH</a:t>
+            </a:r>
+          </a:p>
+          <a:p>
+            <a:r>
               <a:t>Pack_Grade: C</a:t>
             </a:r>
           </a:p>
@@ -3882,6 +3893,41 @@
           </a:p>
           <a:p>
             <a:r>
+              <a:t>=== Alert_Governance ===</a:t>
+            </a:r>
+          </a:p>
+          <a:p>
+            <a:r>
+              <a:t>Alert_Health_Score: 0</a:t>
+            </a:r>
+          </a:p>
+          <a:p>
+            <a:r>
+              <a:t>Alert_Escalation: WATCH</a:t>
+            </a:r>
+          </a:p>
+          <a:p>
+            <a:r>
+              <a:t>Governance_View: CRITICAL</a:t>
+            </a:r>
+          </a:p>
+          <a:p>
+            <a:r>
+              <a:t>Trend_Direction: INSUFFICIENT_HISTORY</a:t>
+            </a:r>
+          </a:p>
+          <a:p>
+            <a:r>
+              <a:t>Top_Category: STRESS</a:t>
+            </a:r>
+          </a:p>
+          <a:p>
+            <a:r>
+              <a:t>Total_Alerts: 12</a:t>
+            </a:r>
+          </a:p>
+          <a:p>
+            <a:r>
               <a:t>=== Surveillance ===</a:t>
             </a:r>
           </a:p>
@@ -3941,7 +3987,7 @@
           <a:lstStyle/>
           <a:p>
             <a:r>
-              <a:t>Portfolio Monitoring</a:t>
+              <a:t>Alert Governance</a:t>
             </a:r>
           </a:p>
         </p:txBody>
@@ -3985,6 +4031,121 @@
           </a:bodyPr>
           <a:lstStyle/>
           <a:p/>
+          <a:p>
+            <a:r>
+              <a:t>Health Score: 0</a:t>
+            </a:r>
+          </a:p>
+          <a:p>
+            <a:r>
+              <a:t>Escalation: WATCH</a:t>
+            </a:r>
+          </a:p>
+          <a:p>
+            <a:r>
+              <a:t>Governance View: CRITICAL</a:t>
+            </a:r>
+          </a:p>
+          <a:p>
+            <a:r>
+              <a:t>Trend Direction: INSUFFICIENT_HISTORY</a:t>
+            </a:r>
+          </a:p>
+          <a:p>
+            <a:r>
+              <a:t>Top Category: STRESS</a:t>
+            </a:r>
+          </a:p>
+        </p:txBody>
+      </p:sp>
+    </p:spTree>
+  </p:cSld>
+  <p:clrMapOvr>
+    <a:masterClrMapping/>
+  </p:clrMapOvr>
+</p:sld>
+</file>
+
+<file path=ppt/slides/slide9.xml><?xml version="1.0" encoding="utf-8"?>
+<p:sld xmlns:a="http://schemas.openxmlformats.org/drawingml/2006/main" xmlns:p="http://schemas.openxmlformats.org/presentationml/2006/main" xmlns:r="http://schemas.openxmlformats.org/officeDocument/2006/relationships">
+  <p:cSld>
+    <p:spTree>
+      <p:nvGrpSpPr>
+        <p:cNvPr id="1" name=""/>
+        <p:cNvGrpSpPr/>
+        <p:nvPr/>
+      </p:nvGrpSpPr>
+      <p:grpSpPr/>
+      <p:sp>
+        <p:nvSpPr>
+          <p:cNvPr id="2" name="Title 1"/>
+          <p:cNvSpPr>
+            <a:spLocks noGrp="1"/>
+          </p:cNvSpPr>
+          <p:nvPr>
+            <p:ph type="title"/>
+          </p:nvPr>
+        </p:nvSpPr>
+        <p:spPr/>
+        <p:txBody>
+          <a:bodyPr/>
+          <a:lstStyle/>
+          <a:p>
+            <a:r>
+              <a:t>Portfolio Monitoring</a:t>
+            </a:r>
+          </a:p>
+        </p:txBody>
+      </p:sp>
+      <p:sp>
+        <p:nvSpPr>
+          <p:cNvPr id="3" name="Content Placeholder 2"/>
+          <p:cNvSpPr>
+            <a:spLocks noGrp="1"/>
+          </p:cNvSpPr>
+          <p:nvPr>
+            <p:ph idx="1"/>
+          </p:nvPr>
+        </p:nvSpPr>
+        <p:spPr/>
+        <p:txBody>
+          <a:bodyPr/>
+          <a:lstStyle/>
+          <a:p/>
+        </p:txBody>
+      </p:sp>
+      <p:sp>
+        <p:nvSpPr>
+          <p:cNvPr id="4" name="TextBox 3"/>
+          <p:cNvSpPr txBox="1"/>
+          <p:nvPr/>
+        </p:nvSpPr>
+        <p:spPr>
+          <a:xfrm>
+            <a:off x="457200" y="1097280"/>
+            <a:ext cx="7315200" cy="3657600"/>
+          </a:xfrm>
+          <a:prstGeom prst="rect">
+            <a:avLst/>
+          </a:prstGeom>
+          <a:noFill/>
+        </p:spPr>
+        <p:txBody>
+          <a:bodyPr wrap="none">
+            <a:spAutoFit/>
+          </a:bodyPr>
+          <a:lstStyle/>
+          <a:p/>
+          <a:p>
+            <a:r>
+              <a:t>Alert_Health_Score: 0</a:t>
+            </a:r>
+          </a:p>
+          <a:p>
+            <a:r>
+              <a:t>Alert_Escalation: WATCH</a:t>
+            </a:r>
+          </a:p>
         </p:txBody>
       </p:sp>
     </p:spTree>

--- a/data/reports/investment_committee_presentation.pptx
+++ b/data/reports/investment_committee_presentation.pptx
@@ -3268,7 +3268,7 @@
           </a:p>
           <a:p>
             <a:r>
-              <a:t>Alert_Escalation: WATCH</a:t>
+              <a:t>Alert_Escalation: ESCALATING</a:t>
             </a:r>
           </a:p>
           <a:p>
@@ -3903,7 +3903,7 @@
           </a:p>
           <a:p>
             <a:r>
-              <a:t>Alert_Escalation: WATCH</a:t>
+              <a:t>Alert_Escalation: ESCALATING</a:t>
             </a:r>
           </a:p>
           <a:p>
@@ -3923,7 +3923,7 @@
           </a:p>
           <a:p>
             <a:r>
-              <a:t>Total_Alerts: 12</a:t>
+              <a:t>Total_Alerts: 24</a:t>
             </a:r>
           </a:p>
           <a:p>
@@ -4038,7 +4038,7 @@
           </a:p>
           <a:p>
             <a:r>
-              <a:t>Escalation: WATCH</a:t>
+              <a:t>Escalation: ESCALATING</a:t>
             </a:r>
           </a:p>
           <a:p>
@@ -4143,7 +4143,7 @@
           </a:p>
           <a:p>
             <a:r>
-              <a:t>Alert_Escalation: WATCH</a:t>
+              <a:t>Alert_Escalation: ESCALATING</a:t>
             </a:r>
           </a:p>
         </p:txBody>

--- a/data/reports/investment_committee_presentation.pptx
+++ b/data/reports/investment_committee_presentation.pptx
@@ -3913,7 +3913,7 @@
           </a:p>
           <a:p>
             <a:r>
-              <a:t>Trend_Direction: INSUFFICIENT_HISTORY</a:t>
+              <a:t>Trend_Direction: STABLE</a:t>
             </a:r>
           </a:p>
           <a:p>
@@ -3923,7 +3923,7 @@
           </a:p>
           <a:p>
             <a:r>
-              <a:t>Total_Alerts: 24</a:t>
+              <a:t>Total_Alerts: 30</a:t>
             </a:r>
           </a:p>
           <a:p>
@@ -4048,7 +4048,7 @@
           </a:p>
           <a:p>
             <a:r>
-              <a:t>Trend Direction: INSUFFICIENT_HISTORY</a:t>
+              <a:t>Trend Direction: STABLE</a:t>
             </a:r>
           </a:p>
           <a:p>

--- a/data/reports/investment_committee_presentation.pptx
+++ b/data/reports/investment_committee_presentation.pptx
@@ -3138,7 +3138,7 @@
           </a:p>
           <a:p>
             <a:r>
-              <a:t>Recommendation: OVERWEIGHT</a:t>
+              <a:t>Recommendation: UNDERWEIGHT</a:t>
             </a:r>
           </a:p>
           <a:p>
@@ -3228,12 +3228,27 @@
           <a:p/>
           <a:p>
             <a:r>
-              <a:t>Pack_Score: 69.16</a:t>
-            </a:r>
-          </a:p>
-          <a:p>
-            <a:r>
-              <a:t>Recommendation: OVERWEIGHT</a:t>
+              <a:t>Governance_Score: 66.84</a:t>
+            </a:r>
+          </a:p>
+          <a:p>
+            <a:r>
+              <a:t>Risk_Level: MODERATE</a:t>
+            </a:r>
+          </a:p>
+          <a:p>
+            <a:r>
+              <a:t>Executive_Action: MAINTAIN_NEUTRAL</a:t>
+            </a:r>
+          </a:p>
+          <a:p>
+            <a:r>
+              <a:t>Pack_Score: 66.92</a:t>
+            </a:r>
+          </a:p>
+          <a:p>
+            <a:r>
+              <a:t>Recommendation: UNDERWEIGHT</a:t>
             </a:r>
           </a:p>
           <a:p>
@@ -3243,17 +3258,17 @@
           </a:p>
           <a:p>
             <a:r>
-              <a:t>Expected_Return_12M: 0.3695181329490239</a:t>
-            </a:r>
-          </a:p>
-          <a:p>
-            <a:r>
-              <a:t>Scenario_Average: 61.17</a:t>
-            </a:r>
-          </a:p>
-          <a:p>
-            <a:r>
-              <a:t>Stress_Average: 27.93</a:t>
+              <a:t>Expected_Return_12M: 0.2771385997117679</a:t>
+            </a:r>
+          </a:p>
+          <a:p>
+            <a:r>
+              <a:t>Scenario_Average: 56.32</a:t>
+            </a:r>
+          </a:p>
+          <a:p>
+            <a:r>
+              <a:t>Stress_Average: 26.7</a:t>
             </a:r>
           </a:p>
           <a:p>
@@ -3263,12 +3278,12 @@
           </a:p>
           <a:p>
             <a:r>
-              <a:t>Alert_Health_Score: 0</a:t>
-            </a:r>
-          </a:p>
-          <a:p>
-            <a:r>
-              <a:t>Alert_Escalation: ESCALATING</a:t>
+              <a:t>Alert_Health_Score: 72.04</a:t>
+            </a:r>
+          </a:p>
+          <a:p>
+            <a:r>
+              <a:t>Alert_Escalation: STABLE</a:t>
             </a:r>
           </a:p>
           <a:p>
@@ -3358,22 +3373,22 @@
           <a:p/>
           <a:p>
             <a:r>
-              <a:t>Expected Return (1M): 3.08%</a:t>
-            </a:r>
-          </a:p>
-          <a:p>
-            <a:r>
-              <a:t>Expected Return (3M): 9.24%</a:t>
-            </a:r>
-          </a:p>
-          <a:p>
-            <a:r>
-              <a:t>Expected Return (12M): 36.95%</a:t>
-            </a:r>
-          </a:p>
-          <a:p>
-            <a:r>
-              <a:t>Forecast Confidence: 76.72</a:t>
+              <a:t>Expected Return (1M): 2.31%</a:t>
+            </a:r>
+          </a:p>
+          <a:p>
+            <a:r>
+              <a:t>Expected Return (3M): 6.93%</a:t>
+            </a:r>
+          </a:p>
+          <a:p>
+            <a:r>
+              <a:t>Expected Return (12M): 27.71%</a:t>
+            </a:r>
+          </a:p>
+          <a:p>
+            <a:r>
+              <a:t>Forecast Confidence: 71.60</a:t>
             </a:r>
           </a:p>
           <a:p>
@@ -3568,17 +3583,17 @@
           <a:p/>
           <a:p>
             <a:r>
-              <a:t>BULL | Score: 99.48 | Rank: 1</a:t>
-            </a:r>
-          </a:p>
-          <a:p>
-            <a:r>
-              <a:t>BASE | Score: 96.94 | Rank: 2</a:t>
-            </a:r>
-          </a:p>
-          <a:p>
-            <a:r>
-              <a:t>BEAR | Score: 48.25 | Rank: 3</a:t>
+              <a:t>BULL | Score: 93.66 | Rank: 1</a:t>
+            </a:r>
+          </a:p>
+          <a:p>
+            <a:r>
+              <a:t>BASE | Score: 89.60 | Rank: 2</a:t>
+            </a:r>
+          </a:p>
+          <a:p>
+            <a:r>
+              <a:t>BEAR | Score: 42.03 | Rank: 3</a:t>
             </a:r>
           </a:p>
           <a:p>
@@ -3668,12 +3683,12 @@
           <a:p/>
           <a:p>
             <a:r>
-              <a:t>RATE_HIKE_SHOCK | Score: 56.78 | Impact: 16.95%</a:t>
-            </a:r>
-          </a:p>
-          <a:p>
-            <a:r>
-              <a:t>VOLATILITY_SHOCK | Score: 50.78 | Impact: 26.95%</a:t>
+              <a:t>RATE_HIKE_SHOCK | Score: 53.09 | Impact: 7.71%</a:t>
+            </a:r>
+          </a:p>
+          <a:p>
+            <a:r>
+              <a:t>VOLATILITY_SHOCK | Score: 47.09 | Impact: 17.71%</a:t>
             </a:r>
           </a:p>
           <a:p>
@@ -3793,17 +3808,17 @@
           </a:p>
           <a:p>
             <a:r>
-              <a:t>Forecast_Recommendation: OVERWEIGHT</a:t>
-            </a:r>
-          </a:p>
-          <a:p>
-            <a:r>
-              <a:t>Forecast_Confidence: 76.7241599682883</a:t>
-            </a:r>
-          </a:p>
-          <a:p>
-            <a:r>
-              <a:t>Expected_Return_12M: 0.3695181329490239</a:t>
+              <a:t>Forecast_Recommendation: UNDERWEIGHT</a:t>
+            </a:r>
+          </a:p>
+          <a:p>
+            <a:r>
+              <a:t>Forecast_Confidence: 71.59732797463064</a:t>
+            </a:r>
+          </a:p>
+          <a:p>
+            <a:r>
+              <a:t>Expected_Return_12M: 0.2771385997117679</a:t>
             </a:r>
           </a:p>
           <a:p>
@@ -3813,7 +3828,7 @@
           </a:p>
           <a:p>
             <a:r>
-              <a:t>Investment_Decision: OVERWEIGHT</a:t>
+              <a:t>Investment_Decision: UNDERWEIGHT</a:t>
             </a:r>
           </a:p>
           <a:p>
@@ -3828,7 +3843,7 @@
           </a:p>
           <a:p>
             <a:r>
-              <a:t>Best_Scenario_Score: 99.47714563932038</a:t>
+              <a:t>Best_Scenario_Score: 93.66394947594468</a:t>
             </a:r>
           </a:p>
           <a:p>
@@ -3853,7 +3868,7 @@
           </a:p>
           <a:p>
             <a:r>
-              <a:t>Best_Stress_Score: 56.78072531796096</a:t>
+              <a:t>Best_Stress_Score: 53.08554398847072</a:t>
             </a:r>
           </a:p>
           <a:p>
@@ -3898,22 +3913,22 @@
           </a:p>
           <a:p>
             <a:r>
-              <a:t>Alert_Health_Score: 0</a:t>
-            </a:r>
-          </a:p>
-          <a:p>
-            <a:r>
-              <a:t>Alert_Escalation: ESCALATING</a:t>
-            </a:r>
-          </a:p>
-          <a:p>
-            <a:r>
-              <a:t>Governance_View: CRITICAL</a:t>
-            </a:r>
-          </a:p>
-          <a:p>
-            <a:r>
-              <a:t>Trend_Direction: STABLE</a:t>
+              <a:t>Alert_Health_Score: 72.04</a:t>
+            </a:r>
+          </a:p>
+          <a:p>
+            <a:r>
+              <a:t>Alert_Escalation: STABLE</a:t>
+            </a:r>
+          </a:p>
+          <a:p>
+            <a:r>
+              <a:t>Governance_View: WATCH</a:t>
+            </a:r>
+          </a:p>
+          <a:p>
+            <a:r>
+              <a:t>Trend_Direction: IMPROVING</a:t>
             </a:r>
           </a:p>
           <a:p>
@@ -3923,7 +3938,47 @@
           </a:p>
           <a:p>
             <a:r>
-              <a:t>Total_Alerts: 30</a:t>
+              <a:t>Total_Alerts: 49</a:t>
+            </a:r>
+          </a:p>
+          <a:p>
+            <a:r>
+              <a:t>=== Governance_Command_Center ===</a:t>
+            </a:r>
+          </a:p>
+          <a:p>
+            <a:r>
+              <a:t>Governance_Score: 66.84</a:t>
+            </a:r>
+          </a:p>
+          <a:p>
+            <a:r>
+              <a:t>Risk_Level: MODERATE</a:t>
+            </a:r>
+          </a:p>
+          <a:p>
+            <a:r>
+              <a:t>Executive_Action: MAINTAIN_NEUTRAL</a:t>
+            </a:r>
+          </a:p>
+          <a:p>
+            <a:r>
+              <a:t>Overall_Status: WATCH</a:t>
+            </a:r>
+          </a:p>
+          <a:p>
+            <a:r>
+              <a:t>Pack_Score: 69.16</a:t>
+            </a:r>
+          </a:p>
+          <a:p>
+            <a:r>
+              <a:t>Recommendation: OVERWEIGHT</a:t>
+            </a:r>
+          </a:p>
+          <a:p>
+            <a:r>
+              <a:t>Forecast_Regime: BULL</a:t>
             </a:r>
           </a:p>
           <a:p>
@@ -4033,22 +4088,22 @@
           <a:p/>
           <a:p>
             <a:r>
-              <a:t>Health Score: 0</a:t>
-            </a:r>
-          </a:p>
-          <a:p>
-            <a:r>
-              <a:t>Escalation: ESCALATING</a:t>
-            </a:r>
-          </a:p>
-          <a:p>
-            <a:r>
-              <a:t>Governance View: CRITICAL</a:t>
-            </a:r>
-          </a:p>
-          <a:p>
-            <a:r>
-              <a:t>Trend Direction: STABLE</a:t>
+              <a:t>Health Score: 72.04</a:t>
+            </a:r>
+          </a:p>
+          <a:p>
+            <a:r>
+              <a:t>Escalation: STABLE</a:t>
+            </a:r>
+          </a:p>
+          <a:p>
+            <a:r>
+              <a:t>Governance View: WATCH</a:t>
+            </a:r>
+          </a:p>
+          <a:p>
+            <a:r>
+              <a:t>Trend Direction: IMPROVING</a:t>
             </a:r>
           </a:p>
           <a:p>
@@ -4138,12 +4193,12 @@
           <a:p/>
           <a:p>
             <a:r>
-              <a:t>Alert_Health_Score: 0</a:t>
-            </a:r>
-          </a:p>
-          <a:p>
-            <a:r>
-              <a:t>Alert_Escalation: ESCALATING</a:t>
+              <a:t>Alert_Health_Score: 72.04</a:t>
+            </a:r>
+          </a:p>
+          <a:p>
+            <a:r>
+              <a:t>Alert_Escalation: STABLE</a:t>
             </a:r>
           </a:p>
         </p:txBody>

--- a/data/reports/investment_committee_presentation.pptx
+++ b/data/reports/investment_committee_presentation.pptx
@@ -3228,17 +3228,17 @@
           <a:p/>
           <a:p>
             <a:r>
-              <a:t>Governance_Score: 66.84</a:t>
-            </a:r>
-          </a:p>
-          <a:p>
-            <a:r>
-              <a:t>Risk_Level: MODERATE</a:t>
-            </a:r>
-          </a:p>
-          <a:p>
-            <a:r>
-              <a:t>Executive_Action: MAINTAIN_NEUTRAL</a:t>
+              <a:t>Governance_Score: 61.06</a:t>
+            </a:r>
+          </a:p>
+          <a:p>
+            <a:r>
+              <a:t>Risk_Level: HIGH</a:t>
+            </a:r>
+          </a:p>
+          <a:p>
+            <a:r>
+              <a:t>Executive_Action: REVIEW_POSITIONING</a:t>
             </a:r>
           </a:p>
           <a:p>
@@ -3278,7 +3278,7 @@
           </a:p>
           <a:p>
             <a:r>
-              <a:t>Alert_Health_Score: 72.04</a:t>
+              <a:t>Alert_Health_Score: 74.85</a:t>
             </a:r>
           </a:p>
           <a:p>
@@ -3913,7 +3913,7 @@
           </a:p>
           <a:p>
             <a:r>
-              <a:t>Alert_Health_Score: 72.04</a:t>
+              <a:t>Alert_Health_Score: 74.85</a:t>
             </a:r>
           </a:p>
           <a:p>
@@ -3938,7 +3938,7 @@
           </a:p>
           <a:p>
             <a:r>
-              <a:t>Total_Alerts: 49</a:t>
+              <a:t>Total_Alerts: 67</a:t>
             </a:r>
           </a:p>
           <a:p>
@@ -3948,17 +3948,17 @@
           </a:p>
           <a:p>
             <a:r>
-              <a:t>Governance_Score: 66.84</a:t>
-            </a:r>
-          </a:p>
-          <a:p>
-            <a:r>
-              <a:t>Risk_Level: MODERATE</a:t>
-            </a:r>
-          </a:p>
-          <a:p>
-            <a:r>
-              <a:t>Executive_Action: MAINTAIN_NEUTRAL</a:t>
+              <a:t>Governance_Score: 61.06</a:t>
+            </a:r>
+          </a:p>
+          <a:p>
+            <a:r>
+              <a:t>Risk_Level: HIGH</a:t>
+            </a:r>
+          </a:p>
+          <a:p>
+            <a:r>
+              <a:t>Executive_Action: REVIEW_POSITIONING</a:t>
             </a:r>
           </a:p>
           <a:p>
@@ -3968,12 +3968,12 @@
           </a:p>
           <a:p>
             <a:r>
-              <a:t>Pack_Score: 69.16</a:t>
-            </a:r>
-          </a:p>
-          <a:p>
-            <a:r>
-              <a:t>Recommendation: OVERWEIGHT</a:t>
+              <a:t>Pack_Score: 66.92</a:t>
+            </a:r>
+          </a:p>
+          <a:p>
+            <a:r>
+              <a:t>Recommendation: UNDERWEIGHT</a:t>
             </a:r>
           </a:p>
           <a:p>
@@ -4088,7 +4088,7 @@
           <a:p/>
           <a:p>
             <a:r>
-              <a:t>Health Score: 72.04</a:t>
+              <a:t>Health Score: 74.85</a:t>
             </a:r>
           </a:p>
           <a:p>
@@ -4193,7 +4193,7 @@
           <a:p/>
           <a:p>
             <a:r>
-              <a:t>Alert_Health_Score: 72.04</a:t>
+              <a:t>Alert_Health_Score: 74.85</a:t>
             </a:r>
           </a:p>
           <a:p>

--- a/data/reports/investment_committee_presentation.pptx
+++ b/data/reports/investment_committee_presentation.pptx
@@ -3228,7 +3228,7 @@
           <a:p/>
           <a:p>
             <a:r>
-              <a:t>Governance_Score: 61.06</a:t>
+              <a:t>Governance_Score: 61.35</a:t>
             </a:r>
           </a:p>
           <a:p>
@@ -3278,7 +3278,7 @@
           </a:p>
           <a:p>
             <a:r>
-              <a:t>Alert_Health_Score: 74.85</a:t>
+              <a:t>Alert_Health_Score: 75.39</a:t>
             </a:r>
           </a:p>
           <a:p>
@@ -3913,7 +3913,7 @@
           </a:p>
           <a:p>
             <a:r>
-              <a:t>Alert_Health_Score: 74.85</a:t>
+              <a:t>Alert_Health_Score: 75.39</a:t>
             </a:r>
           </a:p>
           <a:p>
@@ -3938,7 +3938,7 @@
           </a:p>
           <a:p>
             <a:r>
-              <a:t>Total_Alerts: 67</a:t>
+              <a:t>Total_Alerts: 77</a:t>
             </a:r>
           </a:p>
           <a:p>
@@ -3948,7 +3948,7 @@
           </a:p>
           <a:p>
             <a:r>
-              <a:t>Governance_Score: 61.06</a:t>
+              <a:t>Governance_Score: 61.35</a:t>
             </a:r>
           </a:p>
           <a:p>
@@ -4088,7 +4088,7 @@
           <a:p/>
           <a:p>
             <a:r>
-              <a:t>Health Score: 74.85</a:t>
+              <a:t>Health Score: 75.39</a:t>
             </a:r>
           </a:p>
           <a:p>
@@ -4193,7 +4193,7 @@
           <a:p/>
           <a:p>
             <a:r>
-              <a:t>Alert_Health_Score: 74.85</a:t>
+              <a:t>Alert_Health_Score: 75.39</a:t>
             </a:r>
           </a:p>
           <a:p>

--- a/data/reports/investment_committee_presentation.pptx
+++ b/data/reports/investment_committee_presentation.pptx
@@ -3228,7 +3228,7 @@
           <a:p/>
           <a:p>
             <a:r>
-              <a:t>Governance_Score: 61.35</a:t>
+              <a:t>Governance_Score: 61.58</a:t>
             </a:r>
           </a:p>
           <a:p>
@@ -3278,7 +3278,7 @@
           </a:p>
           <a:p>
             <a:r>
-              <a:t>Alert_Health_Score: 75.39</a:t>
+              <a:t>Alert_Health_Score: 75.8</a:t>
             </a:r>
           </a:p>
           <a:p>
@@ -3913,7 +3913,7 @@
           </a:p>
           <a:p>
             <a:r>
-              <a:t>Alert_Health_Score: 75.39</a:t>
+              <a:t>Alert_Health_Score: 75.8</a:t>
             </a:r>
           </a:p>
           <a:p>
@@ -3938,7 +3938,7 @@
           </a:p>
           <a:p>
             <a:r>
-              <a:t>Total_Alerts: 77</a:t>
+              <a:t>Total_Alerts: 87</a:t>
             </a:r>
           </a:p>
           <a:p>
@@ -3948,7 +3948,7 @@
           </a:p>
           <a:p>
             <a:r>
-              <a:t>Governance_Score: 61.35</a:t>
+              <a:t>Governance_Score: 61.58</a:t>
             </a:r>
           </a:p>
           <a:p>
@@ -4088,7 +4088,7 @@
           <a:p/>
           <a:p>
             <a:r>
-              <a:t>Health Score: 75.39</a:t>
+              <a:t>Health Score: 75.8</a:t>
             </a:r>
           </a:p>
           <a:p>
@@ -4193,7 +4193,7 @@
           <a:p/>
           <a:p>
             <a:r>
-              <a:t>Alert_Health_Score: 75.39</a:t>
+              <a:t>Alert_Health_Score: 75.8</a:t>
             </a:r>
           </a:p>
           <a:p>

--- a/data/reports/investment_committee_presentation.pptx
+++ b/data/reports/investment_committee_presentation.pptx
@@ -3228,7 +3228,7 @@
           <a:p/>
           <a:p>
             <a:r>
-              <a:t>Governance_Score: 61.58</a:t>
+              <a:t>Governance_Score: 61.76</a:t>
             </a:r>
           </a:p>
           <a:p>
@@ -3278,7 +3278,7 @@
           </a:p>
           <a:p>
             <a:r>
-              <a:t>Alert_Health_Score: 75.8</a:t>
+              <a:t>Alert_Health_Score: 76.13</a:t>
             </a:r>
           </a:p>
           <a:p>
@@ -3913,7 +3913,7 @@
           </a:p>
           <a:p>
             <a:r>
-              <a:t>Alert_Health_Score: 75.8</a:t>
+              <a:t>Alert_Health_Score: 76.13</a:t>
             </a:r>
           </a:p>
           <a:p>
@@ -3938,7 +3938,7 @@
           </a:p>
           <a:p>
             <a:r>
-              <a:t>Total_Alerts: 87</a:t>
+              <a:t>Total_Alerts: 97</a:t>
             </a:r>
           </a:p>
           <a:p>
@@ -3948,7 +3948,7 @@
           </a:p>
           <a:p>
             <a:r>
-              <a:t>Governance_Score: 61.58</a:t>
+              <a:t>Governance_Score: 61.76</a:t>
             </a:r>
           </a:p>
           <a:p>
@@ -4088,7 +4088,7 @@
           <a:p/>
           <a:p>
             <a:r>
-              <a:t>Health Score: 75.8</a:t>
+              <a:t>Health Score: 76.13</a:t>
             </a:r>
           </a:p>
           <a:p>
@@ -4193,7 +4193,7 @@
           <a:p/>
           <a:p>
             <a:r>
-              <a:t>Alert_Health_Score: 75.8</a:t>
+              <a:t>Alert_Health_Score: 76.13</a:t>
             </a:r>
           </a:p>
           <a:p>

--- a/data/reports/investment_committee_presentation.pptx
+++ b/data/reports/investment_committee_presentation.pptx
@@ -3228,7 +3228,7 @@
           <a:p/>
           <a:p>
             <a:r>
-              <a:t>Governance_Score: 61.76</a:t>
+              <a:t>Governance_Score: 61.91</a:t>
             </a:r>
           </a:p>
           <a:p>
@@ -3278,7 +3278,7 @@
           </a:p>
           <a:p>
             <a:r>
-              <a:t>Alert_Health_Score: 76.13</a:t>
+              <a:t>Alert_Health_Score: 76.4</a:t>
             </a:r>
           </a:p>
           <a:p>
@@ -3913,7 +3913,7 @@
           </a:p>
           <a:p>
             <a:r>
-              <a:t>Alert_Health_Score: 76.13</a:t>
+              <a:t>Alert_Health_Score: 76.4</a:t>
             </a:r>
           </a:p>
           <a:p>
@@ -3938,7 +3938,7 @@
           </a:p>
           <a:p>
             <a:r>
-              <a:t>Total_Alerts: 97</a:t>
+              <a:t>Total_Alerts: 107</a:t>
             </a:r>
           </a:p>
           <a:p>
@@ -3948,7 +3948,7 @@
           </a:p>
           <a:p>
             <a:r>
-              <a:t>Governance_Score: 61.76</a:t>
+              <a:t>Governance_Score: 61.91</a:t>
             </a:r>
           </a:p>
           <a:p>
@@ -4088,7 +4088,7 @@
           <a:p/>
           <a:p>
             <a:r>
-              <a:t>Health Score: 76.13</a:t>
+              <a:t>Health Score: 76.4</a:t>
             </a:r>
           </a:p>
           <a:p>
@@ -4193,7 +4193,7 @@
           <a:p/>
           <a:p>
             <a:r>
-              <a:t>Alert_Health_Score: 76.13</a:t>
+              <a:t>Alert_Health_Score: 76.4</a:t>
             </a:r>
           </a:p>
           <a:p>

--- a/data/reports/investment_committee_presentation.pptx
+++ b/data/reports/investment_committee_presentation.pptx
@@ -3228,7 +3228,7 @@
           <a:p/>
           <a:p>
             <a:r>
-              <a:t>Governance_Score: 61.91</a:t>
+              <a:t>Governance_Score: 62.03</a:t>
             </a:r>
           </a:p>
           <a:p>
@@ -3278,7 +3278,7 @@
           </a:p>
           <a:p>
             <a:r>
-              <a:t>Alert_Health_Score: 76.4</a:t>
+              <a:t>Alert_Health_Score: 76.62</a:t>
             </a:r>
           </a:p>
           <a:p>
@@ -3913,7 +3913,7 @@
           </a:p>
           <a:p>
             <a:r>
-              <a:t>Alert_Health_Score: 76.4</a:t>
+              <a:t>Alert_Health_Score: 76.62</a:t>
             </a:r>
           </a:p>
           <a:p>
@@ -3938,7 +3938,7 @@
           </a:p>
           <a:p>
             <a:r>
-              <a:t>Total_Alerts: 107</a:t>
+              <a:t>Total_Alerts: 117</a:t>
             </a:r>
           </a:p>
           <a:p>
@@ -3948,7 +3948,7 @@
           </a:p>
           <a:p>
             <a:r>
-              <a:t>Governance_Score: 61.91</a:t>
+              <a:t>Governance_Score: 62.03</a:t>
             </a:r>
           </a:p>
           <a:p>
@@ -4088,7 +4088,7 @@
           <a:p/>
           <a:p>
             <a:r>
-              <a:t>Health Score: 76.4</a:t>
+              <a:t>Health Score: 76.62</a:t>
             </a:r>
           </a:p>
           <a:p>
@@ -4193,7 +4193,7 @@
           <a:p/>
           <a:p>
             <a:r>
-              <a:t>Alert_Health_Score: 76.4</a:t>
+              <a:t>Alert_Health_Score: 76.62</a:t>
             </a:r>
           </a:p>
           <a:p>

--- a/data/reports/investment_committee_presentation.pptx
+++ b/data/reports/investment_committee_presentation.pptx
@@ -3228,7 +3228,7 @@
           <a:p/>
           <a:p>
             <a:r>
-              <a:t>Governance_Score: 62.03</a:t>
+              <a:t>Governance_Score: 62.13</a:t>
             </a:r>
           </a:p>
           <a:p>
@@ -3278,7 +3278,7 @@
           </a:p>
           <a:p>
             <a:r>
-              <a:t>Alert_Health_Score: 76.62</a:t>
+              <a:t>Alert_Health_Score: 76.81</a:t>
             </a:r>
           </a:p>
           <a:p>
@@ -3913,7 +3913,7 @@
           </a:p>
           <a:p>
             <a:r>
-              <a:t>Alert_Health_Score: 76.62</a:t>
+              <a:t>Alert_Health_Score: 76.81</a:t>
             </a:r>
           </a:p>
           <a:p>
@@ -3938,7 +3938,7 @@
           </a:p>
           <a:p>
             <a:r>
-              <a:t>Total_Alerts: 117</a:t>
+              <a:t>Total_Alerts: 127</a:t>
             </a:r>
           </a:p>
           <a:p>
@@ -3948,7 +3948,7 @@
           </a:p>
           <a:p>
             <a:r>
-              <a:t>Governance_Score: 62.03</a:t>
+              <a:t>Governance_Score: 62.13</a:t>
             </a:r>
           </a:p>
           <a:p>
@@ -4088,7 +4088,7 @@
           <a:p/>
           <a:p>
             <a:r>
-              <a:t>Health Score: 76.62</a:t>
+              <a:t>Health Score: 76.81</a:t>
             </a:r>
           </a:p>
           <a:p>
@@ -4193,7 +4193,7 @@
           <a:p/>
           <a:p>
             <a:r>
-              <a:t>Alert_Health_Score: 76.62</a:t>
+              <a:t>Alert_Health_Score: 76.81</a:t>
             </a:r>
           </a:p>
           <a:p>

--- a/data/reports/investment_committee_presentation.pptx
+++ b/data/reports/investment_committee_presentation.pptx
@@ -3228,7 +3228,7 @@
           <a:p/>
           <a:p>
             <a:r>
-              <a:t>Governance_Score: 62.13</a:t>
+              <a:t>Governance_Score: 62.22</a:t>
             </a:r>
           </a:p>
           <a:p>
@@ -3278,7 +3278,7 @@
           </a:p>
           <a:p>
             <a:r>
-              <a:t>Alert_Health_Score: 76.81</a:t>
+              <a:t>Alert_Health_Score: 76.97</a:t>
             </a:r>
           </a:p>
           <a:p>
@@ -3913,7 +3913,7 @@
           </a:p>
           <a:p>
             <a:r>
-              <a:t>Alert_Health_Score: 76.81</a:t>
+              <a:t>Alert_Health_Score: 76.97</a:t>
             </a:r>
           </a:p>
           <a:p>
@@ -3938,7 +3938,7 @@
           </a:p>
           <a:p>
             <a:r>
-              <a:t>Total_Alerts: 127</a:t>
+              <a:t>Total_Alerts: 137</a:t>
             </a:r>
           </a:p>
           <a:p>
@@ -3948,7 +3948,7 @@
           </a:p>
           <a:p>
             <a:r>
-              <a:t>Governance_Score: 62.13</a:t>
+              <a:t>Governance_Score: 62.22</a:t>
             </a:r>
           </a:p>
           <a:p>
@@ -4088,7 +4088,7 @@
           <a:p/>
           <a:p>
             <a:r>
-              <a:t>Health Score: 76.81</a:t>
+              <a:t>Health Score: 76.97</a:t>
             </a:r>
           </a:p>
           <a:p>
@@ -4193,7 +4193,7 @@
           <a:p/>
           <a:p>
             <a:r>
-              <a:t>Alert_Health_Score: 76.81</a:t>
+              <a:t>Alert_Health_Score: 76.97</a:t>
             </a:r>
           </a:p>
           <a:p>

--- a/data/reports/investment_committee_presentation.pptx
+++ b/data/reports/investment_committee_presentation.pptx
@@ -3228,7 +3228,7 @@
           <a:p/>
           <a:p>
             <a:r>
-              <a:t>Governance_Score: 62.22</a:t>
+              <a:t>Governance_Score: 62.3</a:t>
             </a:r>
           </a:p>
           <a:p>
@@ -3278,7 +3278,7 @@
           </a:p>
           <a:p>
             <a:r>
-              <a:t>Alert_Health_Score: 76.97</a:t>
+              <a:t>Alert_Health_Score: 77.11</a:t>
             </a:r>
           </a:p>
           <a:p>
@@ -3913,7 +3913,7 @@
           </a:p>
           <a:p>
             <a:r>
-              <a:t>Alert_Health_Score: 76.97</a:t>
+              <a:t>Alert_Health_Score: 77.11</a:t>
             </a:r>
           </a:p>
           <a:p>
@@ -3938,7 +3938,7 @@
           </a:p>
           <a:p>
             <a:r>
-              <a:t>Total_Alerts: 137</a:t>
+              <a:t>Total_Alerts: 147</a:t>
             </a:r>
           </a:p>
           <a:p>
@@ -3948,7 +3948,7 @@
           </a:p>
           <a:p>
             <a:r>
-              <a:t>Governance_Score: 62.22</a:t>
+              <a:t>Governance_Score: 62.3</a:t>
             </a:r>
           </a:p>
           <a:p>
@@ -4088,7 +4088,7 @@
           <a:p/>
           <a:p>
             <a:r>
-              <a:t>Health Score: 76.97</a:t>
+              <a:t>Health Score: 77.11</a:t>
             </a:r>
           </a:p>
           <a:p>
@@ -4193,7 +4193,7 @@
           <a:p/>
           <a:p>
             <a:r>
-              <a:t>Alert_Health_Score: 76.97</a:t>
+              <a:t>Alert_Health_Score: 77.11</a:t>
             </a:r>
           </a:p>
           <a:p>

--- a/data/reports/investment_committee_presentation.pptx
+++ b/data/reports/investment_committee_presentation.pptx
@@ -3228,7 +3228,7 @@
           <a:p/>
           <a:p>
             <a:r>
-              <a:t>Governance_Score: 62.3</a:t>
+              <a:t>Governance_Score: 62.36</a:t>
             </a:r>
           </a:p>
           <a:p>
@@ -3278,7 +3278,7 @@
           </a:p>
           <a:p>
             <a:r>
-              <a:t>Alert_Health_Score: 77.11</a:t>
+              <a:t>Alert_Health_Score: 77.23</a:t>
             </a:r>
           </a:p>
           <a:p>
@@ -3913,7 +3913,7 @@
           </a:p>
           <a:p>
             <a:r>
-              <a:t>Alert_Health_Score: 77.11</a:t>
+              <a:t>Alert_Health_Score: 77.23</a:t>
             </a:r>
           </a:p>
           <a:p>
@@ -3938,7 +3938,7 @@
           </a:p>
           <a:p>
             <a:r>
-              <a:t>Total_Alerts: 147</a:t>
+              <a:t>Total_Alerts: 157</a:t>
             </a:r>
           </a:p>
           <a:p>
@@ -3948,7 +3948,7 @@
           </a:p>
           <a:p>
             <a:r>
-              <a:t>Governance_Score: 62.3</a:t>
+              <a:t>Governance_Score: 62.36</a:t>
             </a:r>
           </a:p>
           <a:p>
@@ -4088,7 +4088,7 @@
           <a:p/>
           <a:p>
             <a:r>
-              <a:t>Health Score: 77.11</a:t>
+              <a:t>Health Score: 77.23</a:t>
             </a:r>
           </a:p>
           <a:p>
@@ -4193,7 +4193,7 @@
           <a:p/>
           <a:p>
             <a:r>
-              <a:t>Alert_Health_Score: 77.11</a:t>
+              <a:t>Alert_Health_Score: 77.23</a:t>
             </a:r>
           </a:p>
           <a:p>

--- a/data/reports/investment_committee_presentation.pptx
+++ b/data/reports/investment_committee_presentation.pptx
@@ -3228,7 +3228,7 @@
           <a:p/>
           <a:p>
             <a:r>
-              <a:t>Governance_Score: 62.36</a:t>
+              <a:t>Governance_Score: 62.43</a:t>
             </a:r>
           </a:p>
           <a:p>
@@ -3278,7 +3278,7 @@
           </a:p>
           <a:p>
             <a:r>
-              <a:t>Alert_Health_Score: 77.23</a:t>
+              <a:t>Alert_Health_Score: 77.34</a:t>
             </a:r>
           </a:p>
           <a:p>
@@ -3913,7 +3913,7 @@
           </a:p>
           <a:p>
             <a:r>
-              <a:t>Alert_Health_Score: 77.23</a:t>
+              <a:t>Alert_Health_Score: 77.34</a:t>
             </a:r>
           </a:p>
           <a:p>
@@ -3938,7 +3938,7 @@
           </a:p>
           <a:p>
             <a:r>
-              <a:t>Total_Alerts: 157</a:t>
+              <a:t>Total_Alerts: 167</a:t>
             </a:r>
           </a:p>
           <a:p>
@@ -3948,7 +3948,7 @@
           </a:p>
           <a:p>
             <a:r>
-              <a:t>Governance_Score: 62.36</a:t>
+              <a:t>Governance_Score: 62.43</a:t>
             </a:r>
           </a:p>
           <a:p>
@@ -4088,7 +4088,7 @@
           <a:p/>
           <a:p>
             <a:r>
-              <a:t>Health Score: 77.23</a:t>
+              <a:t>Health Score: 77.34</a:t>
             </a:r>
           </a:p>
           <a:p>
@@ -4193,7 +4193,7 @@
           <a:p/>
           <a:p>
             <a:r>
-              <a:t>Alert_Health_Score: 77.23</a:t>
+              <a:t>Alert_Health_Score: 77.34</a:t>
             </a:r>
           </a:p>
           <a:p>

--- a/data/reports/investment_committee_presentation.pptx
+++ b/data/reports/investment_committee_presentation.pptx
@@ -3228,7 +3228,7 @@
           <a:p/>
           <a:p>
             <a:r>
-              <a:t>Governance_Score: 62.43</a:t>
+              <a:t>Governance_Score: 62.47</a:t>
             </a:r>
           </a:p>
           <a:p>
@@ -3278,7 +3278,7 @@
           </a:p>
           <a:p>
             <a:r>
-              <a:t>Alert_Health_Score: 77.34</a:t>
+              <a:t>Alert_Health_Score: 77.43</a:t>
             </a:r>
           </a:p>
           <a:p>
@@ -3913,7 +3913,7 @@
           </a:p>
           <a:p>
             <a:r>
-              <a:t>Alert_Health_Score: 77.34</a:t>
+              <a:t>Alert_Health_Score: 77.43</a:t>
             </a:r>
           </a:p>
           <a:p>
@@ -3938,7 +3938,7 @@
           </a:p>
           <a:p>
             <a:r>
-              <a:t>Total_Alerts: 167</a:t>
+              <a:t>Total_Alerts: 177</a:t>
             </a:r>
           </a:p>
           <a:p>
@@ -3948,7 +3948,7 @@
           </a:p>
           <a:p>
             <a:r>
-              <a:t>Governance_Score: 62.43</a:t>
+              <a:t>Governance_Score: 62.47</a:t>
             </a:r>
           </a:p>
           <a:p>
@@ -4088,7 +4088,7 @@
           <a:p/>
           <a:p>
             <a:r>
-              <a:t>Health Score: 77.34</a:t>
+              <a:t>Health Score: 77.43</a:t>
             </a:r>
           </a:p>
           <a:p>
@@ -4193,7 +4193,7 @@
           <a:p/>
           <a:p>
             <a:r>
-              <a:t>Alert_Health_Score: 77.34</a:t>
+              <a:t>Alert_Health_Score: 77.43</a:t>
             </a:r>
           </a:p>
           <a:p>

--- a/data/reports/investment_committee_presentation.pptx
+++ b/data/reports/investment_committee_presentation.pptx
@@ -3228,7 +3228,7 @@
           <a:p/>
           <a:p>
             <a:r>
-              <a:t>Governance_Score: 62.47</a:t>
+              <a:t>Governance_Score: 62.52</a:t>
             </a:r>
           </a:p>
           <a:p>
@@ -3278,7 +3278,7 @@
           </a:p>
           <a:p>
             <a:r>
-              <a:t>Alert_Health_Score: 77.43</a:t>
+              <a:t>Alert_Health_Score: 77.51</a:t>
             </a:r>
           </a:p>
           <a:p>
@@ -3913,7 +3913,7 @@
           </a:p>
           <a:p>
             <a:r>
-              <a:t>Alert_Health_Score: 77.43</a:t>
+              <a:t>Alert_Health_Score: 77.51</a:t>
             </a:r>
           </a:p>
           <a:p>
@@ -3938,7 +3938,7 @@
           </a:p>
           <a:p>
             <a:r>
-              <a:t>Total_Alerts: 177</a:t>
+              <a:t>Total_Alerts: 187</a:t>
             </a:r>
           </a:p>
           <a:p>
@@ -3948,7 +3948,7 @@
           </a:p>
           <a:p>
             <a:r>
-              <a:t>Governance_Score: 62.47</a:t>
+              <a:t>Governance_Score: 62.52</a:t>
             </a:r>
           </a:p>
           <a:p>
@@ -4088,7 +4088,7 @@
           <a:p/>
           <a:p>
             <a:r>
-              <a:t>Health Score: 77.43</a:t>
+              <a:t>Health Score: 77.51</a:t>
             </a:r>
           </a:p>
           <a:p>
@@ -4193,7 +4193,7 @@
           <a:p/>
           <a:p>
             <a:r>
-              <a:t>Alert_Health_Score: 77.43</a:t>
+              <a:t>Alert_Health_Score: 77.51</a:t>
             </a:r>
           </a:p>
           <a:p>

--- a/data/reports/investment_committee_presentation.pptx
+++ b/data/reports/investment_committee_presentation.pptx
@@ -3228,7 +3228,7 @@
           <a:p/>
           <a:p>
             <a:r>
-              <a:t>Governance_Score: 62.52</a:t>
+              <a:t>Governance_Score: 62.56</a:t>
             </a:r>
           </a:p>
           <a:p>
@@ -3278,7 +3278,7 @@
           </a:p>
           <a:p>
             <a:r>
-              <a:t>Alert_Health_Score: 77.51</a:t>
+              <a:t>Alert_Health_Score: 77.59</a:t>
             </a:r>
           </a:p>
           <a:p>
@@ -3913,7 +3913,7 @@
           </a:p>
           <a:p>
             <a:r>
-              <a:t>Alert_Health_Score: 77.51</a:t>
+              <a:t>Alert_Health_Score: 77.59</a:t>
             </a:r>
           </a:p>
           <a:p>
@@ -3938,7 +3938,7 @@
           </a:p>
           <a:p>
             <a:r>
-              <a:t>Total_Alerts: 187</a:t>
+              <a:t>Total_Alerts: 197</a:t>
             </a:r>
           </a:p>
           <a:p>
@@ -3948,7 +3948,7 @@
           </a:p>
           <a:p>
             <a:r>
-              <a:t>Governance_Score: 62.52</a:t>
+              <a:t>Governance_Score: 62.56</a:t>
             </a:r>
           </a:p>
           <a:p>
@@ -4088,7 +4088,7 @@
           <a:p/>
           <a:p>
             <a:r>
-              <a:t>Health Score: 77.51</a:t>
+              <a:t>Health Score: 77.59</a:t>
             </a:r>
           </a:p>
           <a:p>
@@ -4193,7 +4193,7 @@
           <a:p/>
           <a:p>
             <a:r>
-              <a:t>Alert_Health_Score: 77.51</a:t>
+              <a:t>Alert_Health_Score: 77.59</a:t>
             </a:r>
           </a:p>
           <a:p>

--- a/data/reports/investment_committee_presentation.pptx
+++ b/data/reports/investment_committee_presentation.pptx
@@ -3228,7 +3228,7 @@
           <a:p/>
           <a:p>
             <a:r>
-              <a:t>Governance_Score: 62.56</a:t>
+              <a:t>Governance_Score: 62.6</a:t>
             </a:r>
           </a:p>
           <a:p>
@@ -3278,7 +3278,7 @@
           </a:p>
           <a:p>
             <a:r>
-              <a:t>Alert_Health_Score: 77.59</a:t>
+              <a:t>Alert_Health_Score: 77.66</a:t>
             </a:r>
           </a:p>
           <a:p>
@@ -3913,7 +3913,7 @@
           </a:p>
           <a:p>
             <a:r>
-              <a:t>Alert_Health_Score: 77.59</a:t>
+              <a:t>Alert_Health_Score: 77.66</a:t>
             </a:r>
           </a:p>
           <a:p>
@@ -3938,7 +3938,7 @@
           </a:p>
           <a:p>
             <a:r>
-              <a:t>Total_Alerts: 197</a:t>
+              <a:t>Total_Alerts: 207</a:t>
             </a:r>
           </a:p>
           <a:p>
@@ -3948,7 +3948,7 @@
           </a:p>
           <a:p>
             <a:r>
-              <a:t>Governance_Score: 62.56</a:t>
+              <a:t>Governance_Score: 62.6</a:t>
             </a:r>
           </a:p>
           <a:p>
@@ -4088,7 +4088,7 @@
           <a:p/>
           <a:p>
             <a:r>
-              <a:t>Health Score: 77.59</a:t>
+              <a:t>Health Score: 77.66</a:t>
             </a:r>
           </a:p>
           <a:p>
@@ -4193,7 +4193,7 @@
           <a:p/>
           <a:p>
             <a:r>
-              <a:t>Alert_Health_Score: 77.59</a:t>
+              <a:t>Alert_Health_Score: 77.66</a:t>
             </a:r>
           </a:p>
           <a:p>

--- a/data/reports/investment_committee_presentation.pptx
+++ b/data/reports/investment_committee_presentation.pptx
@@ -3228,7 +3228,7 @@
           <a:p/>
           <a:p>
             <a:r>
-              <a:t>Governance_Score: 62.6</a:t>
+              <a:t>Governance_Score: 62.63</a:t>
             </a:r>
           </a:p>
           <a:p>
@@ -3278,7 +3278,7 @@
           </a:p>
           <a:p>
             <a:r>
-              <a:t>Alert_Health_Score: 77.66</a:t>
+              <a:t>Alert_Health_Score: 77.72</a:t>
             </a:r>
           </a:p>
           <a:p>
@@ -3913,7 +3913,7 @@
           </a:p>
           <a:p>
             <a:r>
-              <a:t>Alert_Health_Score: 77.66</a:t>
+              <a:t>Alert_Health_Score: 77.72</a:t>
             </a:r>
           </a:p>
           <a:p>
@@ -3938,7 +3938,7 @@
           </a:p>
           <a:p>
             <a:r>
-              <a:t>Total_Alerts: 207</a:t>
+              <a:t>Total_Alerts: 217</a:t>
             </a:r>
           </a:p>
           <a:p>
@@ -3948,7 +3948,7 @@
           </a:p>
           <a:p>
             <a:r>
-              <a:t>Governance_Score: 62.6</a:t>
+              <a:t>Governance_Score: 62.63</a:t>
             </a:r>
           </a:p>
           <a:p>
@@ -4088,7 +4088,7 @@
           <a:p/>
           <a:p>
             <a:r>
-              <a:t>Health Score: 77.66</a:t>
+              <a:t>Health Score: 77.72</a:t>
             </a:r>
           </a:p>
           <a:p>
@@ -4193,7 +4193,7 @@
           <a:p/>
           <a:p>
             <a:r>
-              <a:t>Alert_Health_Score: 77.66</a:t>
+              <a:t>Alert_Health_Score: 77.72</a:t>
             </a:r>
           </a:p>
           <a:p>

--- a/data/reports/investment_committee_presentation.pptx
+++ b/data/reports/investment_committee_presentation.pptx
@@ -3228,7 +3228,7 @@
           <a:p/>
           <a:p>
             <a:r>
-              <a:t>Governance_Score: 62.63</a:t>
+              <a:t>Governance_Score: 62.67</a:t>
             </a:r>
           </a:p>
           <a:p>
@@ -3278,7 +3278,7 @@
           </a:p>
           <a:p>
             <a:r>
-              <a:t>Alert_Health_Score: 77.72</a:t>
+              <a:t>Alert_Health_Score: 77.78</a:t>
             </a:r>
           </a:p>
           <a:p>
@@ -3913,7 +3913,7 @@
           </a:p>
           <a:p>
             <a:r>
-              <a:t>Alert_Health_Score: 77.72</a:t>
+              <a:t>Alert_Health_Score: 77.78</a:t>
             </a:r>
           </a:p>
           <a:p>
@@ -3938,7 +3938,7 @@
           </a:p>
           <a:p>
             <a:r>
-              <a:t>Total_Alerts: 217</a:t>
+              <a:t>Total_Alerts: 227</a:t>
             </a:r>
           </a:p>
           <a:p>
@@ -3948,7 +3948,7 @@
           </a:p>
           <a:p>
             <a:r>
-              <a:t>Governance_Score: 62.63</a:t>
+              <a:t>Governance_Score: 62.67</a:t>
             </a:r>
           </a:p>
           <a:p>
@@ -4088,7 +4088,7 @@
           <a:p/>
           <a:p>
             <a:r>
-              <a:t>Health Score: 77.72</a:t>
+              <a:t>Health Score: 77.78</a:t>
             </a:r>
           </a:p>
           <a:p>
@@ -4193,7 +4193,7 @@
           <a:p/>
           <a:p>
             <a:r>
-              <a:t>Alert_Health_Score: 77.72</a:t>
+              <a:t>Alert_Health_Score: 77.78</a:t>
             </a:r>
           </a:p>
           <a:p>

--- a/data/reports/investment_committee_presentation.pptx
+++ b/data/reports/investment_committee_presentation.pptx
@@ -3228,7 +3228,7 @@
           <a:p/>
           <a:p>
             <a:r>
-              <a:t>Governance_Score: 62.67</a:t>
+              <a:t>Governance_Score: 62.69</a:t>
             </a:r>
           </a:p>
           <a:p>
@@ -3278,7 +3278,7 @@
           </a:p>
           <a:p>
             <a:r>
-              <a:t>Alert_Health_Score: 77.78</a:t>
+              <a:t>Alert_Health_Score: 77.83</a:t>
             </a:r>
           </a:p>
           <a:p>
@@ -3913,7 +3913,7 @@
           </a:p>
           <a:p>
             <a:r>
-              <a:t>Alert_Health_Score: 77.78</a:t>
+              <a:t>Alert_Health_Score: 77.83</a:t>
             </a:r>
           </a:p>
           <a:p>
@@ -3938,7 +3938,7 @@
           </a:p>
           <a:p>
             <a:r>
-              <a:t>Total_Alerts: 227</a:t>
+              <a:t>Total_Alerts: 237</a:t>
             </a:r>
           </a:p>
           <a:p>
@@ -3948,7 +3948,7 @@
           </a:p>
           <a:p>
             <a:r>
-              <a:t>Governance_Score: 62.67</a:t>
+              <a:t>Governance_Score: 62.69</a:t>
             </a:r>
           </a:p>
           <a:p>
@@ -4088,7 +4088,7 @@
           <a:p/>
           <a:p>
             <a:r>
-              <a:t>Health Score: 77.78</a:t>
+              <a:t>Health Score: 77.83</a:t>
             </a:r>
           </a:p>
           <a:p>
@@ -4193,7 +4193,7 @@
           <a:p/>
           <a:p>
             <a:r>
-              <a:t>Alert_Health_Score: 77.78</a:t>
+              <a:t>Alert_Health_Score: 77.83</a:t>
             </a:r>
           </a:p>
           <a:p>

--- a/data/reports/investment_committee_presentation.pptx
+++ b/data/reports/investment_committee_presentation.pptx
@@ -3228,7 +3228,7 @@
           <a:p/>
           <a:p>
             <a:r>
-              <a:t>Governance_Score: 62.69</a:t>
+              <a:t>Governance_Score: 62.72</a:t>
             </a:r>
           </a:p>
           <a:p>
@@ -3278,7 +3278,7 @@
           </a:p>
           <a:p>
             <a:r>
-              <a:t>Alert_Health_Score: 77.83</a:t>
+              <a:t>Alert_Health_Score: 77.87</a:t>
             </a:r>
           </a:p>
           <a:p>
@@ -3913,7 +3913,7 @@
           </a:p>
           <a:p>
             <a:r>
-              <a:t>Alert_Health_Score: 77.83</a:t>
+              <a:t>Alert_Health_Score: 77.87</a:t>
             </a:r>
           </a:p>
           <a:p>
@@ -3938,7 +3938,7 @@
           </a:p>
           <a:p>
             <a:r>
-              <a:t>Total_Alerts: 237</a:t>
+              <a:t>Total_Alerts: 247</a:t>
             </a:r>
           </a:p>
           <a:p>
@@ -3948,7 +3948,7 @@
           </a:p>
           <a:p>
             <a:r>
-              <a:t>Governance_Score: 62.69</a:t>
+              <a:t>Governance_Score: 62.72</a:t>
             </a:r>
           </a:p>
           <a:p>
@@ -4088,7 +4088,7 @@
           <a:p/>
           <a:p>
             <a:r>
-              <a:t>Health Score: 77.83</a:t>
+              <a:t>Health Score: 77.87</a:t>
             </a:r>
           </a:p>
           <a:p>
@@ -4193,7 +4193,7 @@
           <a:p/>
           <a:p>
             <a:r>
-              <a:t>Alert_Health_Score: 77.83</a:t>
+              <a:t>Alert_Health_Score: 77.87</a:t>
             </a:r>
           </a:p>
           <a:p>

--- a/data/reports/investment_committee_presentation.pptx
+++ b/data/reports/investment_committee_presentation.pptx
@@ -3228,7 +3228,7 @@
           <a:p/>
           <a:p>
             <a:r>
-              <a:t>Governance_Score: 62.72</a:t>
+              <a:t>Governance_Score: 62.74</a:t>
             </a:r>
           </a:p>
           <a:p>
@@ -3278,7 +3278,7 @@
           </a:p>
           <a:p>
             <a:r>
-              <a:t>Alert_Health_Score: 77.87</a:t>
+              <a:t>Alert_Health_Score: 77.92</a:t>
             </a:r>
           </a:p>
           <a:p>
@@ -3913,7 +3913,7 @@
           </a:p>
           <a:p>
             <a:r>
-              <a:t>Alert_Health_Score: 77.87</a:t>
+              <a:t>Alert_Health_Score: 77.92</a:t>
             </a:r>
           </a:p>
           <a:p>
@@ -3938,7 +3938,7 @@
           </a:p>
           <a:p>
             <a:r>
-              <a:t>Total_Alerts: 247</a:t>
+              <a:t>Total_Alerts: 257</a:t>
             </a:r>
           </a:p>
           <a:p>
@@ -3948,7 +3948,7 @@
           </a:p>
           <a:p>
             <a:r>
-              <a:t>Governance_Score: 62.72</a:t>
+              <a:t>Governance_Score: 62.74</a:t>
             </a:r>
           </a:p>
           <a:p>
@@ -4088,7 +4088,7 @@
           <a:p/>
           <a:p>
             <a:r>
-              <a:t>Health Score: 77.87</a:t>
+              <a:t>Health Score: 77.92</a:t>
             </a:r>
           </a:p>
           <a:p>
@@ -4193,7 +4193,7 @@
           <a:p/>
           <a:p>
             <a:r>
-              <a:t>Alert_Health_Score: 77.87</a:t>
+              <a:t>Alert_Health_Score: 77.92</a:t>
             </a:r>
           </a:p>
           <a:p>

--- a/data/reports/investment_committee_presentation.pptx
+++ b/data/reports/investment_committee_presentation.pptx
@@ -3228,7 +3228,7 @@
           <a:p/>
           <a:p>
             <a:r>
-              <a:t>Governance_Score: 62.74</a:t>
+              <a:t>Governance_Score: 62.77</a:t>
             </a:r>
           </a:p>
           <a:p>
@@ -3278,7 +3278,7 @@
           </a:p>
           <a:p>
             <a:r>
-              <a:t>Alert_Health_Score: 77.92</a:t>
+              <a:t>Alert_Health_Score: 77.96</a:t>
             </a:r>
           </a:p>
           <a:p>
@@ -3913,7 +3913,7 @@
           </a:p>
           <a:p>
             <a:r>
-              <a:t>Alert_Health_Score: 77.92</a:t>
+              <a:t>Alert_Health_Score: 77.96</a:t>
             </a:r>
           </a:p>
           <a:p>
@@ -3938,7 +3938,7 @@
           </a:p>
           <a:p>
             <a:r>
-              <a:t>Total_Alerts: 257</a:t>
+              <a:t>Total_Alerts: 267</a:t>
             </a:r>
           </a:p>
           <a:p>
@@ -3948,7 +3948,7 @@
           </a:p>
           <a:p>
             <a:r>
-              <a:t>Governance_Score: 62.74</a:t>
+              <a:t>Governance_Score: 62.77</a:t>
             </a:r>
           </a:p>
           <a:p>
@@ -4088,7 +4088,7 @@
           <a:p/>
           <a:p>
             <a:r>
-              <a:t>Health Score: 77.92</a:t>
+              <a:t>Health Score: 77.96</a:t>
             </a:r>
           </a:p>
           <a:p>
@@ -4193,7 +4193,7 @@
           <a:p/>
           <a:p>
             <a:r>
-              <a:t>Alert_Health_Score: 77.92</a:t>
+              <a:t>Alert_Health_Score: 77.96</a:t>
             </a:r>
           </a:p>
           <a:p>

--- a/data/reports/investment_committee_presentation.pptx
+++ b/data/reports/investment_committee_presentation.pptx
@@ -3228,7 +3228,7 @@
           <a:p/>
           <a:p>
             <a:r>
-              <a:t>Governance_Score: 62.77</a:t>
+              <a:t>Governance_Score: 62.79</a:t>
             </a:r>
           </a:p>
           <a:p>
@@ -3278,7 +3278,7 @@
           </a:p>
           <a:p>
             <a:r>
-              <a:t>Alert_Health_Score: 77.96</a:t>
+              <a:t>Alert_Health_Score: 78.0</a:t>
             </a:r>
           </a:p>
           <a:p>
@@ -3913,7 +3913,7 @@
           </a:p>
           <a:p>
             <a:r>
-              <a:t>Alert_Health_Score: 77.96</a:t>
+              <a:t>Alert_Health_Score: 78.0</a:t>
             </a:r>
           </a:p>
           <a:p>
@@ -3938,7 +3938,7 @@
           </a:p>
           <a:p>
             <a:r>
-              <a:t>Total_Alerts: 267</a:t>
+              <a:t>Total_Alerts: 277</a:t>
             </a:r>
           </a:p>
           <a:p>
@@ -3948,7 +3948,7 @@
           </a:p>
           <a:p>
             <a:r>
-              <a:t>Governance_Score: 62.77</a:t>
+              <a:t>Governance_Score: 62.79</a:t>
             </a:r>
           </a:p>
           <a:p>
@@ -4088,7 +4088,7 @@
           <a:p/>
           <a:p>
             <a:r>
-              <a:t>Health Score: 77.96</a:t>
+              <a:t>Health Score: 78.0</a:t>
             </a:r>
           </a:p>
           <a:p>
@@ -4193,7 +4193,7 @@
           <a:p/>
           <a:p>
             <a:r>
-              <a:t>Alert_Health_Score: 77.96</a:t>
+              <a:t>Alert_Health_Score: 78.0</a:t>
             </a:r>
           </a:p>
           <a:p>

--- a/data/reports/investment_committee_presentation.pptx
+++ b/data/reports/investment_committee_presentation.pptx
@@ -3228,7 +3228,7 @@
           <a:p/>
           <a:p>
             <a:r>
-              <a:t>Governance_Score: 62.79</a:t>
+              <a:t>Governance_Score: 62.8</a:t>
             </a:r>
           </a:p>
           <a:p>
@@ -3278,7 +3278,7 @@
           </a:p>
           <a:p>
             <a:r>
-              <a:t>Alert_Health_Score: 78.0</a:t>
+              <a:t>Alert_Health_Score: 78.03</a:t>
             </a:r>
           </a:p>
           <a:p>
@@ -3913,7 +3913,7 @@
           </a:p>
           <a:p>
             <a:r>
-              <a:t>Alert_Health_Score: 78.0</a:t>
+              <a:t>Alert_Health_Score: 78.03</a:t>
             </a:r>
           </a:p>
           <a:p>
@@ -3938,7 +3938,7 @@
           </a:p>
           <a:p>
             <a:r>
-              <a:t>Total_Alerts: 277</a:t>
+              <a:t>Total_Alerts: 287</a:t>
             </a:r>
           </a:p>
           <a:p>
@@ -3948,7 +3948,7 @@
           </a:p>
           <a:p>
             <a:r>
-              <a:t>Governance_Score: 62.79</a:t>
+              <a:t>Governance_Score: 62.8</a:t>
             </a:r>
           </a:p>
           <a:p>
@@ -4088,7 +4088,7 @@
           <a:p/>
           <a:p>
             <a:r>
-              <a:t>Health Score: 78.0</a:t>
+              <a:t>Health Score: 78.03</a:t>
             </a:r>
           </a:p>
           <a:p>
@@ -4193,7 +4193,7 @@
           <a:p/>
           <a:p>
             <a:r>
-              <a:t>Alert_Health_Score: 78.0</a:t>
+              <a:t>Alert_Health_Score: 78.03</a:t>
             </a:r>
           </a:p>
           <a:p>

--- a/data/reports/investment_committee_presentation.pptx
+++ b/data/reports/investment_committee_presentation.pptx
@@ -3228,7 +3228,7 @@
           <a:p/>
           <a:p>
             <a:r>
-              <a:t>Governance_Score: 62.8</a:t>
+              <a:t>Governance_Score: 62.82</a:t>
             </a:r>
           </a:p>
           <a:p>
@@ -3278,7 +3278,7 @@
           </a:p>
           <a:p>
             <a:r>
-              <a:t>Alert_Health_Score: 78.03</a:t>
+              <a:t>Alert_Health_Score: 78.06</a:t>
             </a:r>
           </a:p>
           <a:p>
@@ -3913,7 +3913,7 @@
           </a:p>
           <a:p>
             <a:r>
-              <a:t>Alert_Health_Score: 78.03</a:t>
+              <a:t>Alert_Health_Score: 78.06</a:t>
             </a:r>
           </a:p>
           <a:p>
@@ -3938,7 +3938,7 @@
           </a:p>
           <a:p>
             <a:r>
-              <a:t>Total_Alerts: 287</a:t>
+              <a:t>Total_Alerts: 297</a:t>
             </a:r>
           </a:p>
           <a:p>
@@ -3948,7 +3948,7 @@
           </a:p>
           <a:p>
             <a:r>
-              <a:t>Governance_Score: 62.8</a:t>
+              <a:t>Governance_Score: 62.82</a:t>
             </a:r>
           </a:p>
           <a:p>
@@ -4088,7 +4088,7 @@
           <a:p/>
           <a:p>
             <a:r>
-              <a:t>Health Score: 78.03</a:t>
+              <a:t>Health Score: 78.06</a:t>
             </a:r>
           </a:p>
           <a:p>
@@ -4193,7 +4193,7 @@
           <a:p/>
           <a:p>
             <a:r>
-              <a:t>Alert_Health_Score: 78.03</a:t>
+              <a:t>Alert_Health_Score: 78.06</a:t>
             </a:r>
           </a:p>
           <a:p>

--- a/data/reports/investment_committee_presentation.pptx
+++ b/data/reports/investment_committee_presentation.pptx
@@ -3228,7 +3228,7 @@
           <a:p/>
           <a:p>
             <a:r>
-              <a:t>Governance_Score: 62.82</a:t>
+              <a:t>Governance_Score: 62.84</a:t>
             </a:r>
           </a:p>
           <a:p>
@@ -3278,7 +3278,7 @@
           </a:p>
           <a:p>
             <a:r>
-              <a:t>Alert_Health_Score: 78.06</a:t>
+              <a:t>Alert_Health_Score: 78.09</a:t>
             </a:r>
           </a:p>
           <a:p>
@@ -3913,7 +3913,7 @@
           </a:p>
           <a:p>
             <a:r>
-              <a:t>Alert_Health_Score: 78.06</a:t>
+              <a:t>Alert_Health_Score: 78.09</a:t>
             </a:r>
           </a:p>
           <a:p>
@@ -3938,7 +3938,7 @@
           </a:p>
           <a:p>
             <a:r>
-              <a:t>Total_Alerts: 297</a:t>
+              <a:t>Total_Alerts: 307</a:t>
             </a:r>
           </a:p>
           <a:p>
@@ -3948,7 +3948,7 @@
           </a:p>
           <a:p>
             <a:r>
-              <a:t>Governance_Score: 62.82</a:t>
+              <a:t>Governance_Score: 62.84</a:t>
             </a:r>
           </a:p>
           <a:p>
@@ -4088,7 +4088,7 @@
           <a:p/>
           <a:p>
             <a:r>
-              <a:t>Health Score: 78.06</a:t>
+              <a:t>Health Score: 78.09</a:t>
             </a:r>
           </a:p>
           <a:p>
@@ -4193,7 +4193,7 @@
           <a:p/>
           <a:p>
             <a:r>
-              <a:t>Alert_Health_Score: 78.06</a:t>
+              <a:t>Alert_Health_Score: 78.09</a:t>
             </a:r>
           </a:p>
           <a:p>

--- a/data/reports/investment_committee_presentation.pptx
+++ b/data/reports/investment_committee_presentation.pptx
@@ -3228,7 +3228,7 @@
           <a:p/>
           <a:p>
             <a:r>
-              <a:t>Governance_Score: 62.84</a:t>
+              <a:t>Governance_Score: 62.85</a:t>
             </a:r>
           </a:p>
           <a:p>
@@ -3278,7 +3278,7 @@
           </a:p>
           <a:p>
             <a:r>
-              <a:t>Alert_Health_Score: 78.09</a:t>
+              <a:t>Alert_Health_Score: 78.12</a:t>
             </a:r>
           </a:p>
           <a:p>
@@ -3913,7 +3913,7 @@
           </a:p>
           <a:p>
             <a:r>
-              <a:t>Alert_Health_Score: 78.09</a:t>
+              <a:t>Alert_Health_Score: 78.12</a:t>
             </a:r>
           </a:p>
           <a:p>
@@ -3938,7 +3938,7 @@
           </a:p>
           <a:p>
             <a:r>
-              <a:t>Total_Alerts: 307</a:t>
+              <a:t>Total_Alerts: 317</a:t>
             </a:r>
           </a:p>
           <a:p>
@@ -3948,7 +3948,7 @@
           </a:p>
           <a:p>
             <a:r>
-              <a:t>Governance_Score: 62.84</a:t>
+              <a:t>Governance_Score: 62.85</a:t>
             </a:r>
           </a:p>
           <a:p>
@@ -4088,7 +4088,7 @@
           <a:p/>
           <a:p>
             <a:r>
-              <a:t>Health Score: 78.09</a:t>
+              <a:t>Health Score: 78.12</a:t>
             </a:r>
           </a:p>
           <a:p>
@@ -4193,7 +4193,7 @@
           <a:p/>
           <a:p>
             <a:r>
-              <a:t>Alert_Health_Score: 78.09</a:t>
+              <a:t>Alert_Health_Score: 78.12</a:t>
             </a:r>
           </a:p>
           <a:p>

--- a/data/reports/investment_committee_presentation.pptx
+++ b/data/reports/investment_committee_presentation.pptx
@@ -3228,7 +3228,7 @@
           <a:p/>
           <a:p>
             <a:r>
-              <a:t>Governance_Score: 62.85</a:t>
+              <a:t>Governance_Score: 62.87</a:t>
             </a:r>
           </a:p>
           <a:p>
@@ -3278,7 +3278,7 @@
           </a:p>
           <a:p>
             <a:r>
-              <a:t>Alert_Health_Score: 78.12</a:t>
+              <a:t>Alert_Health_Score: 78.15</a:t>
             </a:r>
           </a:p>
           <a:p>
@@ -3913,7 +3913,7 @@
           </a:p>
           <a:p>
             <a:r>
-              <a:t>Alert_Health_Score: 78.12</a:t>
+              <a:t>Alert_Health_Score: 78.15</a:t>
             </a:r>
           </a:p>
           <a:p>
@@ -3938,7 +3938,7 @@
           </a:p>
           <a:p>
             <a:r>
-              <a:t>Total_Alerts: 317</a:t>
+              <a:t>Total_Alerts: 327</a:t>
             </a:r>
           </a:p>
           <a:p>
@@ -3948,7 +3948,7 @@
           </a:p>
           <a:p>
             <a:r>
-              <a:t>Governance_Score: 62.85</a:t>
+              <a:t>Governance_Score: 62.87</a:t>
             </a:r>
           </a:p>
           <a:p>
@@ -4088,7 +4088,7 @@
           <a:p/>
           <a:p>
             <a:r>
-              <a:t>Health Score: 78.12</a:t>
+              <a:t>Health Score: 78.15</a:t>
             </a:r>
           </a:p>
           <a:p>
@@ -4193,7 +4193,7 @@
           <a:p/>
           <a:p>
             <a:r>
-              <a:t>Alert_Health_Score: 78.12</a:t>
+              <a:t>Alert_Health_Score: 78.15</a:t>
             </a:r>
           </a:p>
           <a:p>

--- a/data/reports/investment_committee_presentation.pptx
+++ b/data/reports/investment_committee_presentation.pptx
@@ -3228,7 +3228,7 @@
           <a:p/>
           <a:p>
             <a:r>
-              <a:t>Governance_Score: 62.87</a:t>
+              <a:t>Governance_Score: 62.89</a:t>
             </a:r>
           </a:p>
           <a:p>
@@ -3278,7 +3278,7 @@
           </a:p>
           <a:p>
             <a:r>
-              <a:t>Alert_Health_Score: 78.15</a:t>
+              <a:t>Alert_Health_Score: 78.18</a:t>
             </a:r>
           </a:p>
           <a:p>
@@ -3913,7 +3913,7 @@
           </a:p>
           <a:p>
             <a:r>
-              <a:t>Alert_Health_Score: 78.15</a:t>
+              <a:t>Alert_Health_Score: 78.18</a:t>
             </a:r>
           </a:p>
           <a:p>
@@ -3938,7 +3938,7 @@
           </a:p>
           <a:p>
             <a:r>
-              <a:t>Total_Alerts: 327</a:t>
+              <a:t>Total_Alerts: 337</a:t>
             </a:r>
           </a:p>
           <a:p>
@@ -3948,7 +3948,7 @@
           </a:p>
           <a:p>
             <a:r>
-              <a:t>Governance_Score: 62.87</a:t>
+              <a:t>Governance_Score: 62.89</a:t>
             </a:r>
           </a:p>
           <a:p>
@@ -4088,7 +4088,7 @@
           <a:p/>
           <a:p>
             <a:r>
-              <a:t>Health Score: 78.15</a:t>
+              <a:t>Health Score: 78.18</a:t>
             </a:r>
           </a:p>
           <a:p>
@@ -4193,7 +4193,7 @@
           <a:p/>
           <a:p>
             <a:r>
-              <a:t>Alert_Health_Score: 78.15</a:t>
+              <a:t>Alert_Health_Score: 78.18</a:t>
             </a:r>
           </a:p>
           <a:p>

--- a/data/reports/investment_committee_presentation.pptx
+++ b/data/reports/investment_committee_presentation.pptx
@@ -3228,7 +3228,7 @@
           <a:p/>
           <a:p>
             <a:r>
-              <a:t>Governance_Score: 62.89</a:t>
+              <a:t>Governance_Score: 62.9</a:t>
             </a:r>
           </a:p>
           <a:p>
@@ -3278,7 +3278,7 @@
           </a:p>
           <a:p>
             <a:r>
-              <a:t>Alert_Health_Score: 78.18</a:t>
+              <a:t>Alert_Health_Score: 78.2</a:t>
             </a:r>
           </a:p>
           <a:p>
@@ -3913,7 +3913,7 @@
           </a:p>
           <a:p>
             <a:r>
-              <a:t>Alert_Health_Score: 78.18</a:t>
+              <a:t>Alert_Health_Score: 78.2</a:t>
             </a:r>
           </a:p>
           <a:p>
@@ -3938,7 +3938,7 @@
           </a:p>
           <a:p>
             <a:r>
-              <a:t>Total_Alerts: 337</a:t>
+              <a:t>Total_Alerts: 347</a:t>
             </a:r>
           </a:p>
           <a:p>
@@ -3948,7 +3948,7 @@
           </a:p>
           <a:p>
             <a:r>
-              <a:t>Governance_Score: 62.89</a:t>
+              <a:t>Governance_Score: 62.9</a:t>
             </a:r>
           </a:p>
           <a:p>
@@ -4088,7 +4088,7 @@
           <a:p/>
           <a:p>
             <a:r>
-              <a:t>Health Score: 78.18</a:t>
+              <a:t>Health Score: 78.2</a:t>
             </a:r>
           </a:p>
           <a:p>
@@ -4193,7 +4193,7 @@
           <a:p/>
           <a:p>
             <a:r>
-              <a:t>Alert_Health_Score: 78.18</a:t>
+              <a:t>Alert_Health_Score: 78.2</a:t>
             </a:r>
           </a:p>
           <a:p>

--- a/data/reports/investment_committee_presentation.pptx
+++ b/data/reports/investment_committee_presentation.pptx
@@ -3228,7 +3228,7 @@
           <a:p/>
           <a:p>
             <a:r>
-              <a:t>Governance_Score: 62.9</a:t>
+              <a:t>Governance_Score: 62.91</a:t>
             </a:r>
           </a:p>
           <a:p>
@@ -3278,7 +3278,7 @@
           </a:p>
           <a:p>
             <a:r>
-              <a:t>Alert_Health_Score: 78.2</a:t>
+              <a:t>Alert_Health_Score: 78.22</a:t>
             </a:r>
           </a:p>
           <a:p>
@@ -3913,7 +3913,7 @@
           </a:p>
           <a:p>
             <a:r>
-              <a:t>Alert_Health_Score: 78.2</a:t>
+              <a:t>Alert_Health_Score: 78.22</a:t>
             </a:r>
           </a:p>
           <a:p>
@@ -3938,7 +3938,7 @@
           </a:p>
           <a:p>
             <a:r>
-              <a:t>Total_Alerts: 347</a:t>
+              <a:t>Total_Alerts: 357</a:t>
             </a:r>
           </a:p>
           <a:p>
@@ -3948,7 +3948,7 @@
           </a:p>
           <a:p>
             <a:r>
-              <a:t>Governance_Score: 62.9</a:t>
+              <a:t>Governance_Score: 62.91</a:t>
             </a:r>
           </a:p>
           <a:p>
@@ -4088,7 +4088,7 @@
           <a:p/>
           <a:p>
             <a:r>
-              <a:t>Health Score: 78.2</a:t>
+              <a:t>Health Score: 78.22</a:t>
             </a:r>
           </a:p>
           <a:p>
@@ -4193,7 +4193,7 @@
           <a:p/>
           <a:p>
             <a:r>
-              <a:t>Alert_Health_Score: 78.2</a:t>
+              <a:t>Alert_Health_Score: 78.22</a:t>
             </a:r>
           </a:p>
           <a:p>

--- a/data/reports/investment_committee_presentation.pptx
+++ b/data/reports/investment_committee_presentation.pptx
@@ -3228,7 +3228,7 @@
           <a:p/>
           <a:p>
             <a:r>
-              <a:t>Governance_Score: 62.91</a:t>
+              <a:t>Governance_Score: 62.92</a:t>
             </a:r>
           </a:p>
           <a:p>
@@ -3278,7 +3278,7 @@
           </a:p>
           <a:p>
             <a:r>
-              <a:t>Alert_Health_Score: 78.22</a:t>
+              <a:t>Alert_Health_Score: 78.24</a:t>
             </a:r>
           </a:p>
           <a:p>
@@ -3913,7 +3913,7 @@
           </a:p>
           <a:p>
             <a:r>
-              <a:t>Alert_Health_Score: 78.22</a:t>
+              <a:t>Alert_Health_Score: 78.24</a:t>
             </a:r>
           </a:p>
           <a:p>
@@ -3938,7 +3938,7 @@
           </a:p>
           <a:p>
             <a:r>
-              <a:t>Total_Alerts: 357</a:t>
+              <a:t>Total_Alerts: 367</a:t>
             </a:r>
           </a:p>
           <a:p>
@@ -3948,7 +3948,7 @@
           </a:p>
           <a:p>
             <a:r>
-              <a:t>Governance_Score: 62.91</a:t>
+              <a:t>Governance_Score: 62.92</a:t>
             </a:r>
           </a:p>
           <a:p>
@@ -4088,7 +4088,7 @@
           <a:p/>
           <a:p>
             <a:r>
-              <a:t>Health Score: 78.22</a:t>
+              <a:t>Health Score: 78.24</a:t>
             </a:r>
           </a:p>
           <a:p>
@@ -4193,7 +4193,7 @@
           <a:p/>
           <a:p>
             <a:r>
-              <a:t>Alert_Health_Score: 78.22</a:t>
+              <a:t>Alert_Health_Score: 78.24</a:t>
             </a:r>
           </a:p>
           <a:p>

--- a/data/reports/investment_committee_presentation.pptx
+++ b/data/reports/investment_committee_presentation.pptx
@@ -3228,7 +3228,7 @@
           <a:p/>
           <a:p>
             <a:r>
-              <a:t>Governance_Score: 62.92</a:t>
+              <a:t>Governance_Score: 62.93</a:t>
             </a:r>
           </a:p>
           <a:p>
@@ -3278,7 +3278,7 @@
           </a:p>
           <a:p>
             <a:r>
-              <a:t>Alert_Health_Score: 78.24</a:t>
+              <a:t>Alert_Health_Score: 78.26</a:t>
             </a:r>
           </a:p>
           <a:p>
@@ -3913,7 +3913,7 @@
           </a:p>
           <a:p>
             <a:r>
-              <a:t>Alert_Health_Score: 78.24</a:t>
+              <a:t>Alert_Health_Score: 78.26</a:t>
             </a:r>
           </a:p>
           <a:p>
@@ -3938,7 +3938,7 @@
           </a:p>
           <a:p>
             <a:r>
-              <a:t>Total_Alerts: 367</a:t>
+              <a:t>Total_Alerts: 377</a:t>
             </a:r>
           </a:p>
           <a:p>
@@ -3948,7 +3948,7 @@
           </a:p>
           <a:p>
             <a:r>
-              <a:t>Governance_Score: 62.92</a:t>
+              <a:t>Governance_Score: 62.93</a:t>
             </a:r>
           </a:p>
           <a:p>
@@ -4088,7 +4088,7 @@
           <a:p/>
           <a:p>
             <a:r>
-              <a:t>Health Score: 78.24</a:t>
+              <a:t>Health Score: 78.26</a:t>
             </a:r>
           </a:p>
           <a:p>
@@ -4193,7 +4193,7 @@
           <a:p/>
           <a:p>
             <a:r>
-              <a:t>Alert_Health_Score: 78.24</a:t>
+              <a:t>Alert_Health_Score: 78.26</a:t>
             </a:r>
           </a:p>
           <a:p>

--- a/data/reports/investment_committee_presentation.pptx
+++ b/data/reports/investment_committee_presentation.pptx
@@ -3228,7 +3228,7 @@
           <a:p/>
           <a:p>
             <a:r>
-              <a:t>Governance_Score: 62.93</a:t>
+              <a:t>Governance_Score: 62.94</a:t>
             </a:r>
           </a:p>
           <a:p>
@@ -3278,7 +3278,7 @@
           </a:p>
           <a:p>
             <a:r>
-              <a:t>Alert_Health_Score: 78.26</a:t>
+              <a:t>Alert_Health_Score: 78.28</a:t>
             </a:r>
           </a:p>
           <a:p>
@@ -3913,7 +3913,7 @@
           </a:p>
           <a:p>
             <a:r>
-              <a:t>Alert_Health_Score: 78.26</a:t>
+              <a:t>Alert_Health_Score: 78.28</a:t>
             </a:r>
           </a:p>
           <a:p>
@@ -3938,7 +3938,7 @@
           </a:p>
           <a:p>
             <a:r>
-              <a:t>Total_Alerts: 377</a:t>
+              <a:t>Total_Alerts: 387</a:t>
             </a:r>
           </a:p>
           <a:p>
@@ -3948,7 +3948,7 @@
           </a:p>
           <a:p>
             <a:r>
-              <a:t>Governance_Score: 62.93</a:t>
+              <a:t>Governance_Score: 62.94</a:t>
             </a:r>
           </a:p>
           <a:p>
@@ -4088,7 +4088,7 @@
           <a:p/>
           <a:p>
             <a:r>
-              <a:t>Health Score: 78.26</a:t>
+              <a:t>Health Score: 78.28</a:t>
             </a:r>
           </a:p>
           <a:p>
@@ -4193,7 +4193,7 @@
           <a:p/>
           <a:p>
             <a:r>
-              <a:t>Alert_Health_Score: 78.26</a:t>
+              <a:t>Alert_Health_Score: 78.28</a:t>
             </a:r>
           </a:p>
           <a:p>

--- a/data/reports/investment_committee_presentation.pptx
+++ b/data/reports/investment_committee_presentation.pptx
@@ -3228,7 +3228,7 @@
           <a:p/>
           <a:p>
             <a:r>
-              <a:t>Governance_Score: 62.94</a:t>
+              <a:t>Governance_Score: 62.95</a:t>
             </a:r>
           </a:p>
           <a:p>
@@ -3278,7 +3278,7 @@
           </a:p>
           <a:p>
             <a:r>
-              <a:t>Alert_Health_Score: 78.28</a:t>
+              <a:t>Alert_Health_Score: 78.3</a:t>
             </a:r>
           </a:p>
           <a:p>
@@ -3913,7 +3913,7 @@
           </a:p>
           <a:p>
             <a:r>
-              <a:t>Alert_Health_Score: 78.28</a:t>
+              <a:t>Alert_Health_Score: 78.3</a:t>
             </a:r>
           </a:p>
           <a:p>
@@ -3938,7 +3938,7 @@
           </a:p>
           <a:p>
             <a:r>
-              <a:t>Total_Alerts: 387</a:t>
+              <a:t>Total_Alerts: 397</a:t>
             </a:r>
           </a:p>
           <a:p>
@@ -3948,7 +3948,7 @@
           </a:p>
           <a:p>
             <a:r>
-              <a:t>Governance_Score: 62.94</a:t>
+              <a:t>Governance_Score: 62.95</a:t>
             </a:r>
           </a:p>
           <a:p>
@@ -4088,7 +4088,7 @@
           <a:p/>
           <a:p>
             <a:r>
-              <a:t>Health Score: 78.28</a:t>
+              <a:t>Health Score: 78.3</a:t>
             </a:r>
           </a:p>
           <a:p>
@@ -4193,7 +4193,7 @@
           <a:p/>
           <a:p>
             <a:r>
-              <a:t>Alert_Health_Score: 78.28</a:t>
+              <a:t>Alert_Health_Score: 78.3</a:t>
             </a:r>
           </a:p>
           <a:p>

--- a/data/reports/investment_committee_presentation.pptx
+++ b/data/reports/investment_committee_presentation.pptx
@@ -3228,7 +3228,7 @@
           <a:p/>
           <a:p>
             <a:r>
-              <a:t>Governance_Score: 62.95</a:t>
+              <a:t>Governance_Score: 62.96</a:t>
             </a:r>
           </a:p>
           <a:p>
@@ -3278,7 +3278,7 @@
           </a:p>
           <a:p>
             <a:r>
-              <a:t>Alert_Health_Score: 78.3</a:t>
+              <a:t>Alert_Health_Score: 78.32</a:t>
             </a:r>
           </a:p>
           <a:p>
@@ -3913,7 +3913,7 @@
           </a:p>
           <a:p>
             <a:r>
-              <a:t>Alert_Health_Score: 78.3</a:t>
+              <a:t>Alert_Health_Score: 78.32</a:t>
             </a:r>
           </a:p>
           <a:p>
@@ -3938,7 +3938,7 @@
           </a:p>
           <a:p>
             <a:r>
-              <a:t>Total_Alerts: 397</a:t>
+              <a:t>Total_Alerts: 407</a:t>
             </a:r>
           </a:p>
           <a:p>
@@ -3948,7 +3948,7 @@
           </a:p>
           <a:p>
             <a:r>
-              <a:t>Governance_Score: 62.95</a:t>
+              <a:t>Governance_Score: 62.96</a:t>
             </a:r>
           </a:p>
           <a:p>
@@ -4088,7 +4088,7 @@
           <a:p/>
           <a:p>
             <a:r>
-              <a:t>Health Score: 78.3</a:t>
+              <a:t>Health Score: 78.32</a:t>
             </a:r>
           </a:p>
           <a:p>
@@ -4193,7 +4193,7 @@
           <a:p/>
           <a:p>
             <a:r>
-              <a:t>Alert_Health_Score: 78.3</a:t>
+              <a:t>Alert_Health_Score: 78.32</a:t>
             </a:r>
           </a:p>
           <a:p>

--- a/data/reports/investment_committee_presentation.pptx
+++ b/data/reports/investment_committee_presentation.pptx
@@ -3228,7 +3228,7 @@
           <a:p/>
           <a:p>
             <a:r>
-              <a:t>Governance_Score: 62.96</a:t>
+              <a:t>Governance_Score: 62.97</a:t>
             </a:r>
           </a:p>
           <a:p>
@@ -3278,7 +3278,7 @@
           </a:p>
           <a:p>
             <a:r>
-              <a:t>Alert_Health_Score: 78.32</a:t>
+              <a:t>Alert_Health_Score: 78.33</a:t>
             </a:r>
           </a:p>
           <a:p>
@@ -3913,7 +3913,7 @@
           </a:p>
           <a:p>
             <a:r>
-              <a:t>Alert_Health_Score: 78.32</a:t>
+              <a:t>Alert_Health_Score: 78.33</a:t>
             </a:r>
           </a:p>
           <a:p>
@@ -3938,7 +3938,7 @@
           </a:p>
           <a:p>
             <a:r>
-              <a:t>Total_Alerts: 407</a:t>
+              <a:t>Total_Alerts: 417</a:t>
             </a:r>
           </a:p>
           <a:p>
@@ -3948,7 +3948,7 @@
           </a:p>
           <a:p>
             <a:r>
-              <a:t>Governance_Score: 62.96</a:t>
+              <a:t>Governance_Score: 62.97</a:t>
             </a:r>
           </a:p>
           <a:p>
@@ -4088,7 +4088,7 @@
           <a:p/>
           <a:p>
             <a:r>
-              <a:t>Health Score: 78.32</a:t>
+              <a:t>Health Score: 78.33</a:t>
             </a:r>
           </a:p>
           <a:p>
@@ -4193,7 +4193,7 @@
           <a:p/>
           <a:p>
             <a:r>
-              <a:t>Alert_Health_Score: 78.32</a:t>
+              <a:t>Alert_Health_Score: 78.33</a:t>
             </a:r>
           </a:p>
           <a:p>

--- a/data/reports/investment_committee_presentation.pptx
+++ b/data/reports/investment_committee_presentation.pptx
@@ -3228,7 +3228,7 @@
           <a:p/>
           <a:p>
             <a:r>
-              <a:t>Governance_Score: 62.97</a:t>
+              <a:t>Governance_Score: 62.98</a:t>
             </a:r>
           </a:p>
           <a:p>
@@ -3278,7 +3278,7 @@
           </a:p>
           <a:p>
             <a:r>
-              <a:t>Alert_Health_Score: 78.33</a:t>
+              <a:t>Alert_Health_Score: 78.35</a:t>
             </a:r>
           </a:p>
           <a:p>
@@ -3913,7 +3913,7 @@
           </a:p>
           <a:p>
             <a:r>
-              <a:t>Alert_Health_Score: 78.33</a:t>
+              <a:t>Alert_Health_Score: 78.35</a:t>
             </a:r>
           </a:p>
           <a:p>
@@ -3938,7 +3938,7 @@
           </a:p>
           <a:p>
             <a:r>
-              <a:t>Total_Alerts: 417</a:t>
+              <a:t>Total_Alerts: 427</a:t>
             </a:r>
           </a:p>
           <a:p>
@@ -3948,7 +3948,7 @@
           </a:p>
           <a:p>
             <a:r>
-              <a:t>Governance_Score: 62.97</a:t>
+              <a:t>Governance_Score: 62.98</a:t>
             </a:r>
           </a:p>
           <a:p>
@@ -4088,7 +4088,7 @@
           <a:p/>
           <a:p>
             <a:r>
-              <a:t>Health Score: 78.33</a:t>
+              <a:t>Health Score: 78.35</a:t>
             </a:r>
           </a:p>
           <a:p>
@@ -4193,7 +4193,7 @@
           <a:p/>
           <a:p>
             <a:r>
-              <a:t>Alert_Health_Score: 78.33</a:t>
+              <a:t>Alert_Health_Score: 78.35</a:t>
             </a:r>
           </a:p>
           <a:p>

--- a/data/reports/investment_committee_presentation.pptx
+++ b/data/reports/investment_committee_presentation.pptx
@@ -3228,7 +3228,7 @@
           <a:p/>
           <a:p>
             <a:r>
-              <a:t>Governance_Score: 62.98</a:t>
+              <a:t>Governance_Score: 62.99</a:t>
             </a:r>
           </a:p>
           <a:p>
@@ -3278,7 +3278,7 @@
           </a:p>
           <a:p>
             <a:r>
-              <a:t>Alert_Health_Score: 78.35</a:t>
+              <a:t>Alert_Health_Score: 78.36</a:t>
             </a:r>
           </a:p>
           <a:p>
@@ -3913,7 +3913,7 @@
           </a:p>
           <a:p>
             <a:r>
-              <a:t>Alert_Health_Score: 78.35</a:t>
+              <a:t>Alert_Health_Score: 78.36</a:t>
             </a:r>
           </a:p>
           <a:p>
@@ -3938,7 +3938,7 @@
           </a:p>
           <a:p>
             <a:r>
-              <a:t>Total_Alerts: 427</a:t>
+              <a:t>Total_Alerts: 437</a:t>
             </a:r>
           </a:p>
           <a:p>
@@ -3948,7 +3948,7 @@
           </a:p>
           <a:p>
             <a:r>
-              <a:t>Governance_Score: 62.98</a:t>
+              <a:t>Governance_Score: 62.99</a:t>
             </a:r>
           </a:p>
           <a:p>
@@ -4088,7 +4088,7 @@
           <a:p/>
           <a:p>
             <a:r>
-              <a:t>Health Score: 78.35</a:t>
+              <a:t>Health Score: 78.36</a:t>
             </a:r>
           </a:p>
           <a:p>
@@ -4193,7 +4193,7 @@
           <a:p/>
           <a:p>
             <a:r>
-              <a:t>Alert_Health_Score: 78.35</a:t>
+              <a:t>Alert_Health_Score: 78.36</a:t>
             </a:r>
           </a:p>
           <a:p>

--- a/data/reports/investment_committee_presentation.pptx
+++ b/data/reports/investment_committee_presentation.pptx
@@ -3228,7 +3228,7 @@
           <a:p/>
           <a:p>
             <a:r>
-              <a:t>Governance_Score: 62.99</a:t>
+              <a:t>Governance_Score: 63.0</a:t>
             </a:r>
           </a:p>
           <a:p>
@@ -3278,7 +3278,7 @@
           </a:p>
           <a:p>
             <a:r>
-              <a:t>Alert_Health_Score: 78.36</a:t>
+              <a:t>Alert_Health_Score: 78.38</a:t>
             </a:r>
           </a:p>
           <a:p>
@@ -3913,7 +3913,7 @@
           </a:p>
           <a:p>
             <a:r>
-              <a:t>Alert_Health_Score: 78.36</a:t>
+              <a:t>Alert_Health_Score: 78.38</a:t>
             </a:r>
           </a:p>
           <a:p>
@@ -3938,7 +3938,7 @@
           </a:p>
           <a:p>
             <a:r>
-              <a:t>Total_Alerts: 437</a:t>
+              <a:t>Total_Alerts: 447</a:t>
             </a:r>
           </a:p>
           <a:p>
@@ -3948,7 +3948,7 @@
           </a:p>
           <a:p>
             <a:r>
-              <a:t>Governance_Score: 62.99</a:t>
+              <a:t>Governance_Score: 63.0</a:t>
             </a:r>
           </a:p>
           <a:p>
@@ -4088,7 +4088,7 @@
           <a:p/>
           <a:p>
             <a:r>
-              <a:t>Health Score: 78.36</a:t>
+              <a:t>Health Score: 78.38</a:t>
             </a:r>
           </a:p>
           <a:p>
@@ -4193,7 +4193,7 @@
           <a:p/>
           <a:p>
             <a:r>
-              <a:t>Alert_Health_Score: 78.36</a:t>
+              <a:t>Alert_Health_Score: 78.38</a:t>
             </a:r>
           </a:p>
           <a:p>

--- a/data/reports/investment_committee_presentation.pptx
+++ b/data/reports/investment_committee_presentation.pptx
@@ -3278,7 +3278,7 @@
           </a:p>
           <a:p>
             <a:r>
-              <a:t>Alert_Health_Score: 78.38</a:t>
+              <a:t>Alert_Health_Score: 78.39</a:t>
             </a:r>
           </a:p>
           <a:p>
@@ -3913,7 +3913,7 @@
           </a:p>
           <a:p>
             <a:r>
-              <a:t>Alert_Health_Score: 78.38</a:t>
+              <a:t>Alert_Health_Score: 78.39</a:t>
             </a:r>
           </a:p>
           <a:p>
@@ -3938,7 +3938,7 @@
           </a:p>
           <a:p>
             <a:r>
-              <a:t>Total_Alerts: 447</a:t>
+              <a:t>Total_Alerts: 457</a:t>
             </a:r>
           </a:p>
           <a:p>
@@ -4088,7 +4088,7 @@
           <a:p/>
           <a:p>
             <a:r>
-              <a:t>Health Score: 78.38</a:t>
+              <a:t>Health Score: 78.39</a:t>
             </a:r>
           </a:p>
           <a:p>
@@ -4193,7 +4193,7 @@
           <a:p/>
           <a:p>
             <a:r>
-              <a:t>Alert_Health_Score: 78.38</a:t>
+              <a:t>Alert_Health_Score: 78.39</a:t>
             </a:r>
           </a:p>
           <a:p>

--- a/data/reports/investment_committee_presentation.pptx
+++ b/data/reports/investment_committee_presentation.pptx
@@ -3228,7 +3228,7 @@
           <a:p/>
           <a:p>
             <a:r>
-              <a:t>Governance_Score: 63.0</a:t>
+              <a:t>Governance_Score: 63.01</a:t>
             </a:r>
           </a:p>
           <a:p>
@@ -3278,7 +3278,7 @@
           </a:p>
           <a:p>
             <a:r>
-              <a:t>Alert_Health_Score: 78.39</a:t>
+              <a:t>Alert_Health_Score: 78.4</a:t>
             </a:r>
           </a:p>
           <a:p>
@@ -3913,7 +3913,7 @@
           </a:p>
           <a:p>
             <a:r>
-              <a:t>Alert_Health_Score: 78.39</a:t>
+              <a:t>Alert_Health_Score: 78.4</a:t>
             </a:r>
           </a:p>
           <a:p>
@@ -3938,7 +3938,7 @@
           </a:p>
           <a:p>
             <a:r>
-              <a:t>Total_Alerts: 457</a:t>
+              <a:t>Total_Alerts: 467</a:t>
             </a:r>
           </a:p>
           <a:p>
@@ -3948,7 +3948,7 @@
           </a:p>
           <a:p>
             <a:r>
-              <a:t>Governance_Score: 63.0</a:t>
+              <a:t>Governance_Score: 63.01</a:t>
             </a:r>
           </a:p>
           <a:p>
@@ -4088,7 +4088,7 @@
           <a:p/>
           <a:p>
             <a:r>
-              <a:t>Health Score: 78.39</a:t>
+              <a:t>Health Score: 78.4</a:t>
             </a:r>
           </a:p>
           <a:p>
@@ -4193,7 +4193,7 @@
           <a:p/>
           <a:p>
             <a:r>
-              <a:t>Alert_Health_Score: 78.39</a:t>
+              <a:t>Alert_Health_Score: 78.4</a:t>
             </a:r>
           </a:p>
           <a:p>

--- a/data/reports/investment_committee_presentation.pptx
+++ b/data/reports/investment_committee_presentation.pptx
@@ -3228,7 +3228,7 @@
           <a:p/>
           <a:p>
             <a:r>
-              <a:t>Governance_Score: 63.01</a:t>
+              <a:t>Governance_Score: 63.02</a:t>
             </a:r>
           </a:p>
           <a:p>
@@ -3278,7 +3278,7 @@
           </a:p>
           <a:p>
             <a:r>
-              <a:t>Alert_Health_Score: 78.4</a:t>
+              <a:t>Alert_Health_Score: 78.42</a:t>
             </a:r>
           </a:p>
           <a:p>
@@ -3913,7 +3913,7 @@
           </a:p>
           <a:p>
             <a:r>
-              <a:t>Alert_Health_Score: 78.4</a:t>
+              <a:t>Alert_Health_Score: 78.42</a:t>
             </a:r>
           </a:p>
           <a:p>
@@ -3938,7 +3938,7 @@
           </a:p>
           <a:p>
             <a:r>
-              <a:t>Total_Alerts: 467</a:t>
+              <a:t>Total_Alerts: 477</a:t>
             </a:r>
           </a:p>
           <a:p>
@@ -3948,7 +3948,7 @@
           </a:p>
           <a:p>
             <a:r>
-              <a:t>Governance_Score: 63.01</a:t>
+              <a:t>Governance_Score: 63.02</a:t>
             </a:r>
           </a:p>
           <a:p>
@@ -4088,7 +4088,7 @@
           <a:p/>
           <a:p>
             <a:r>
-              <a:t>Health Score: 78.4</a:t>
+              <a:t>Health Score: 78.42</a:t>
             </a:r>
           </a:p>
           <a:p>
@@ -4193,7 +4193,7 @@
           <a:p/>
           <a:p>
             <a:r>
-              <a:t>Alert_Health_Score: 78.4</a:t>
+              <a:t>Alert_Health_Score: 78.42</a:t>
             </a:r>
           </a:p>
           <a:p>

--- a/data/reports/investment_committee_presentation.pptx
+++ b/data/reports/investment_committee_presentation.pptx
@@ -3278,7 +3278,7 @@
           </a:p>
           <a:p>
             <a:r>
-              <a:t>Alert_Health_Score: 78.42</a:t>
+              <a:t>Alert_Health_Score: 78.43</a:t>
             </a:r>
           </a:p>
           <a:p>
@@ -3913,7 +3913,7 @@
           </a:p>
           <a:p>
             <a:r>
-              <a:t>Alert_Health_Score: 78.42</a:t>
+              <a:t>Alert_Health_Score: 78.43</a:t>
             </a:r>
           </a:p>
           <a:p>
@@ -3938,7 +3938,7 @@
           </a:p>
           <a:p>
             <a:r>
-              <a:t>Total_Alerts: 477</a:t>
+              <a:t>Total_Alerts: 487</a:t>
             </a:r>
           </a:p>
           <a:p>
@@ -4088,7 +4088,7 @@
           <a:p/>
           <a:p>
             <a:r>
-              <a:t>Health Score: 78.42</a:t>
+              <a:t>Health Score: 78.43</a:t>
             </a:r>
           </a:p>
           <a:p>
@@ -4193,7 +4193,7 @@
           <a:p/>
           <a:p>
             <a:r>
-              <a:t>Alert_Health_Score: 78.42</a:t>
+              <a:t>Alert_Health_Score: 78.43</a:t>
             </a:r>
           </a:p>
           <a:p>

--- a/data/reports/investment_committee_presentation.pptx
+++ b/data/reports/investment_committee_presentation.pptx
@@ -3228,7 +3228,7 @@
           <a:p/>
           <a:p>
             <a:r>
-              <a:t>Governance_Score: 63.02</a:t>
+              <a:t>Governance_Score: 63.03</a:t>
             </a:r>
           </a:p>
           <a:p>
@@ -3278,7 +3278,7 @@
           </a:p>
           <a:p>
             <a:r>
-              <a:t>Alert_Health_Score: 78.43</a:t>
+              <a:t>Alert_Health_Score: 78.44</a:t>
             </a:r>
           </a:p>
           <a:p>
@@ -3913,7 +3913,7 @@
           </a:p>
           <a:p>
             <a:r>
-              <a:t>Alert_Health_Score: 78.43</a:t>
+              <a:t>Alert_Health_Score: 78.44</a:t>
             </a:r>
           </a:p>
           <a:p>
@@ -3938,7 +3938,7 @@
           </a:p>
           <a:p>
             <a:r>
-              <a:t>Total_Alerts: 487</a:t>
+              <a:t>Total_Alerts: 497</a:t>
             </a:r>
           </a:p>
           <a:p>
@@ -3948,7 +3948,7 @@
           </a:p>
           <a:p>
             <a:r>
-              <a:t>Governance_Score: 63.02</a:t>
+              <a:t>Governance_Score: 63.03</a:t>
             </a:r>
           </a:p>
           <a:p>
@@ -4088,7 +4088,7 @@
           <a:p/>
           <a:p>
             <a:r>
-              <a:t>Health Score: 78.43</a:t>
+              <a:t>Health Score: 78.44</a:t>
             </a:r>
           </a:p>
           <a:p>
@@ -4193,7 +4193,7 @@
           <a:p/>
           <a:p>
             <a:r>
-              <a:t>Alert_Health_Score: 78.43</a:t>
+              <a:t>Alert_Health_Score: 78.44</a:t>
             </a:r>
           </a:p>
           <a:p>
